--- a/Yerevan-Housing-Market-Slides.pptx
+++ b/Yerevan-Housing-Market-Slides.pptx
@@ -20,6 +20,13 @@
     <p:sldId id="268" r:id="rId19"/>
     <p:sldId id="269" r:id="rId20"/>
     <p:sldId id="270" r:id="rId21"/>
+    <p:sldId id="271" r:id="rId22"/>
+    <p:sldId id="272" r:id="rId23"/>
+    <p:sldId id="273" r:id="rId24"/>
+    <p:sldId id="274" r:id="rId25"/>
+    <p:sldId id="275" r:id="rId26"/>
+    <p:sldId id="276" r:id="rId27"/>
+    <p:sldId id="277" r:id="rId28"/>
   </p:sldIdLst>
   <p:sldSz cx="12191695" cy="6858000" type="screen4x3"/>
   <p:notesSz cx="6858000" cy="9144000"/>
@@ -4707,6 +4714,735 @@
 </p:sld>
 </file>
 
+<file path=ppt/slides/slide16.xml><?xml version="1.0" encoding="utf-8"?>
+<p:sld xmlns:a="http://schemas.openxmlformats.org/drawingml/2006/main" xmlns:p="http://schemas.openxmlformats.org/presentationml/2006/main" xmlns:r="http://schemas.openxmlformats.org/officeDocument/2006/relationships">
+  <p:cSld>
+    <p:spTree>
+      <p:nvGrpSpPr>
+        <p:cNvPr id="1" name=""/>
+        <p:cNvGrpSpPr/>
+        <p:nvPr/>
+      </p:nvGrpSpPr>
+      <p:grpSpPr/>
+      <p:sp>
+        <p:nvSpPr>
+          <p:cNvPr id="2" name="TextBox 1"/>
+          <p:cNvSpPr txBox="1"/>
+          <p:nvPr/>
+        </p:nvSpPr>
+        <p:spPr>
+          <a:xfrm>
+            <a:off x="0" y="2926080"/>
+            <a:ext cx="12191695" cy="457200"/>
+          </a:xfrm>
+          <a:prstGeom prst="rect">
+            <a:avLst/>
+          </a:prstGeom>
+          <a:noFill/>
+        </p:spPr>
+        <p:txBody>
+          <a:bodyPr wrap="square" lIns="0" rIns="0" tIns="0" bIns="0" anchor="t">
+            <a:spAutoFit/>
+          </a:bodyPr>
+          <a:lstStyle/>
+          <a:p>
+            <a:pPr algn="ctr">
+              <a:lnSpc>
+                <a:spcPct val="115000"/>
+              </a:lnSpc>
+            </a:pPr>
+            <a:r>
+              <a:rPr sz="1800" b="1">
+                <a:solidFill>
+                  <a:srgbClr val="666666"/>
+                </a:solidFill>
+                <a:latin typeface="Helvetica"/>
+              </a:rPr>
+              <a:t>DATA ANNEX</a:t>
+            </a:r>
+          </a:p>
+        </p:txBody>
+      </p:sp>
+      <p:sp>
+        <p:nvSpPr>
+          <p:cNvPr id="3" name="TextBox 2"/>
+          <p:cNvSpPr txBox="1"/>
+          <p:nvPr/>
+        </p:nvSpPr>
+        <p:spPr>
+          <a:xfrm>
+            <a:off x="0" y="3383280"/>
+            <a:ext cx="12191695" cy="731520"/>
+          </a:xfrm>
+          <a:prstGeom prst="rect">
+            <a:avLst/>
+          </a:prstGeom>
+          <a:noFill/>
+        </p:spPr>
+        <p:txBody>
+          <a:bodyPr wrap="square" lIns="0" rIns="0" tIns="0" bIns="0" anchor="t">
+            <a:spAutoFit/>
+          </a:bodyPr>
+          <a:lstStyle/>
+          <a:p>
+            <a:pPr algn="ctr">
+              <a:lnSpc>
+                <a:spcPct val="115000"/>
+              </a:lnSpc>
+            </a:pPr>
+            <a:r>
+              <a:rPr sz="3000" b="1">
+                <a:solidFill>
+                  <a:srgbClr val="1F3A5F"/>
+                </a:solidFill>
+                <a:latin typeface="Helvetica"/>
+              </a:rPr>
+              <a:t>The Official Data, Drawn</a:t>
+            </a:r>
+          </a:p>
+        </p:txBody>
+      </p:sp>
+      <p:sp>
+        <p:nvSpPr>
+          <p:cNvPr id="4" name="TextBox 3"/>
+          <p:cNvSpPr txBox="1"/>
+          <p:nvPr/>
+        </p:nvSpPr>
+        <p:spPr>
+          <a:xfrm>
+            <a:off x="11430000" y="6537960"/>
+            <a:ext cx="640080" cy="274320"/>
+          </a:xfrm>
+          <a:prstGeom prst="rect">
+            <a:avLst/>
+          </a:prstGeom>
+          <a:noFill/>
+        </p:spPr>
+        <p:txBody>
+          <a:bodyPr wrap="square" lIns="0" rIns="0" tIns="0" bIns="0" anchor="t">
+            <a:spAutoFit/>
+          </a:bodyPr>
+          <a:lstStyle/>
+          <a:p>
+            <a:pPr algn="r">
+              <a:lnSpc>
+                <a:spcPct val="115000"/>
+              </a:lnSpc>
+            </a:pPr>
+            <a:r>
+              <a:rPr sz="1000" b="0">
+                <a:solidFill>
+                  <a:srgbClr val="AAAAAA"/>
+                </a:solidFill>
+                <a:latin typeface="Helvetica"/>
+              </a:rPr>
+              <a:t>16</a:t>
+            </a:r>
+          </a:p>
+        </p:txBody>
+      </p:sp>
+    </p:spTree>
+  </p:cSld>
+  <p:clrMapOvr>
+    <a:masterClrMapping/>
+  </p:clrMapOvr>
+</p:sld>
+</file>
+
+<file path=ppt/slides/slide17.xml><?xml version="1.0" encoding="utf-8"?>
+<p:sld xmlns:a="http://schemas.openxmlformats.org/drawingml/2006/main" xmlns:p="http://schemas.openxmlformats.org/presentationml/2006/main" xmlns:r="http://schemas.openxmlformats.org/officeDocument/2006/relationships">
+  <p:cSld>
+    <p:spTree>
+      <p:nvGrpSpPr>
+        <p:cNvPr id="1" name=""/>
+        <p:cNvGrpSpPr/>
+        <p:nvPr/>
+      </p:nvGrpSpPr>
+      <p:grpSpPr/>
+      <p:sp>
+        <p:nvSpPr>
+          <p:cNvPr id="2" name="TextBox 1"/>
+          <p:cNvSpPr txBox="1"/>
+          <p:nvPr/>
+        </p:nvSpPr>
+        <p:spPr>
+          <a:xfrm>
+            <a:off x="548640" y="365760"/>
+            <a:ext cx="10972800" cy="822960"/>
+          </a:xfrm>
+          <a:prstGeom prst="rect">
+            <a:avLst/>
+          </a:prstGeom>
+          <a:noFill/>
+        </p:spPr>
+        <p:txBody>
+          <a:bodyPr wrap="square" lIns="0" rIns="0" tIns="0" bIns="0" anchor="t">
+            <a:spAutoFit/>
+          </a:bodyPr>
+          <a:lstStyle/>
+          <a:p>
+            <a:pPr algn="l">
+              <a:lnSpc>
+                <a:spcPct val="115000"/>
+              </a:lnSpc>
+            </a:pPr>
+            <a:r>
+              <a:rPr sz="2800" b="1">
+                <a:solidFill>
+                  <a:srgbClr val="1F3A5F"/>
+                </a:solidFill>
+                <a:latin typeface="Helvetica"/>
+              </a:rPr>
+              <a:t>Figure A1. CBA price index: prices nearly doubled since 2018</a:t>
+            </a:r>
+          </a:p>
+        </p:txBody>
+      </p:sp>
+      <p:pic>
+        <p:nvPicPr>
+          <p:cNvPr id="3" name="Picture 2" descr="fig_rppi_idx.png"/>
+          <p:cNvPicPr>
+            <a:picLocks noChangeAspect="1"/>
+          </p:cNvPicPr>
+          <p:nvPr/>
+        </p:nvPicPr>
+        <p:blipFill>
+          <a:blip r:embed="rId2"/>
+          <a:stretch>
+            <a:fillRect/>
+          </a:stretch>
+        </p:blipFill>
+        <p:spPr>
+          <a:xfrm>
+            <a:off x="1451178" y="1188720"/>
+            <a:ext cx="9289338" cy="4480560"/>
+          </a:xfrm>
+          <a:prstGeom prst="rect">
+            <a:avLst/>
+          </a:prstGeom>
+        </p:spPr>
+      </p:pic>
+      <p:sp>
+        <p:nvSpPr>
+          <p:cNvPr id="4" name="TextBox 3"/>
+          <p:cNvSpPr txBox="1"/>
+          <p:nvPr/>
+        </p:nvSpPr>
+        <p:spPr>
+          <a:xfrm>
+            <a:off x="548640" y="5779008"/>
+            <a:ext cx="11064240" cy="365760"/>
+          </a:xfrm>
+          <a:prstGeom prst="rect">
+            <a:avLst/>
+          </a:prstGeom>
+          <a:noFill/>
+        </p:spPr>
+        <p:txBody>
+          <a:bodyPr wrap="square" lIns="0" rIns="0" tIns="0" bIns="0" anchor="t">
+            <a:spAutoFit/>
+          </a:bodyPr>
+          <a:lstStyle/>
+          <a:p>
+            <a:pPr algn="ctr">
+              <a:lnSpc>
+                <a:spcPct val="115000"/>
+              </a:lnSpc>
+            </a:pPr>
+            <a:r>
+              <a:rPr sz="1200" b="0">
+                <a:solidFill>
+                  <a:srgbClr val="000000"/>
+                </a:solidFill>
+                <a:latin typeface="Helvetica"/>
+              </a:rPr>
+              <a:t>Residential property price index by segment, quarterly, 2018Q1 to 2026Q2 (2018 = 100).</a:t>
+            </a:r>
+          </a:p>
+        </p:txBody>
+      </p:sp>
+      <p:sp>
+        <p:nvSpPr>
+          <p:cNvPr id="5" name="TextBox 4"/>
+          <p:cNvSpPr txBox="1"/>
+          <p:nvPr/>
+        </p:nvSpPr>
+        <p:spPr>
+          <a:xfrm>
+            <a:off x="548640" y="6099048"/>
+            <a:ext cx="11064240" cy="365760"/>
+          </a:xfrm>
+          <a:prstGeom prst="rect">
+            <a:avLst/>
+          </a:prstGeom>
+          <a:noFill/>
+        </p:spPr>
+        <p:txBody>
+          <a:bodyPr wrap="square" lIns="0" rIns="0" tIns="0" bIns="0" anchor="t">
+            <a:spAutoFit/>
+          </a:bodyPr>
+          <a:lstStyle/>
+          <a:p>
+            <a:pPr algn="ctr">
+              <a:lnSpc>
+                <a:spcPct val="115000"/>
+              </a:lnSpc>
+            </a:pPr>
+            <a:r>
+              <a:rPr sz="1000" b="0">
+                <a:solidFill>
+                  <a:srgbClr val="666666"/>
+                </a:solidFill>
+                <a:latin typeface="Helvetica"/>
+              </a:rPr>
+              <a:t>Source: Central Bank of Armenia RPPI data export, downloaded September 2, 2026.</a:t>
+            </a:r>
+          </a:p>
+        </p:txBody>
+      </p:sp>
+      <p:sp>
+        <p:nvSpPr>
+          <p:cNvPr id="6" name="TextBox 5"/>
+          <p:cNvSpPr txBox="1"/>
+          <p:nvPr/>
+        </p:nvSpPr>
+        <p:spPr>
+          <a:xfrm>
+            <a:off x="11430000" y="6537960"/>
+            <a:ext cx="640080" cy="274320"/>
+          </a:xfrm>
+          <a:prstGeom prst="rect">
+            <a:avLst/>
+          </a:prstGeom>
+          <a:noFill/>
+        </p:spPr>
+        <p:txBody>
+          <a:bodyPr wrap="square" lIns="0" rIns="0" tIns="0" bIns="0" anchor="t">
+            <a:spAutoFit/>
+          </a:bodyPr>
+          <a:lstStyle/>
+          <a:p>
+            <a:pPr algn="r">
+              <a:lnSpc>
+                <a:spcPct val="115000"/>
+              </a:lnSpc>
+            </a:pPr>
+            <a:r>
+              <a:rPr sz="1000" b="0">
+                <a:solidFill>
+                  <a:srgbClr val="AAAAAA"/>
+                </a:solidFill>
+                <a:latin typeface="Helvetica"/>
+              </a:rPr>
+              <a:t>17</a:t>
+            </a:r>
+          </a:p>
+        </p:txBody>
+      </p:sp>
+    </p:spTree>
+  </p:cSld>
+  <p:clrMapOvr>
+    <a:masterClrMapping/>
+  </p:clrMapOvr>
+</p:sld>
+</file>
+
+<file path=ppt/slides/slide18.xml><?xml version="1.0" encoding="utf-8"?>
+<p:sld xmlns:a="http://schemas.openxmlformats.org/drawingml/2006/main" xmlns:p="http://schemas.openxmlformats.org/presentationml/2006/main" xmlns:r="http://schemas.openxmlformats.org/officeDocument/2006/relationships">
+  <p:cSld>
+    <p:spTree>
+      <p:nvGrpSpPr>
+        <p:cNvPr id="1" name=""/>
+        <p:cNvGrpSpPr/>
+        <p:nvPr/>
+      </p:nvGrpSpPr>
+      <p:grpSpPr/>
+      <p:sp>
+        <p:nvSpPr>
+          <p:cNvPr id="2" name="TextBox 1"/>
+          <p:cNvSpPr txBox="1"/>
+          <p:nvPr/>
+        </p:nvSpPr>
+        <p:spPr>
+          <a:xfrm>
+            <a:off x="548640" y="365760"/>
+            <a:ext cx="10972800" cy="822960"/>
+          </a:xfrm>
+          <a:prstGeom prst="rect">
+            <a:avLst/>
+          </a:prstGeom>
+          <a:noFill/>
+        </p:spPr>
+        <p:txBody>
+          <a:bodyPr wrap="square" lIns="0" rIns="0" tIns="0" bIns="0" anchor="t">
+            <a:spAutoFit/>
+          </a:bodyPr>
+          <a:lstStyle/>
+          <a:p>
+            <a:pPr algn="l">
+              <a:lnSpc>
+                <a:spcPct val="115000"/>
+              </a:lnSpc>
+            </a:pPr>
+            <a:r>
+              <a:rPr sz="2800" b="1">
+                <a:solidFill>
+                  <a:srgbClr val="1F3A5F"/>
+                </a:solidFill>
+                <a:latin typeface="Helvetica"/>
+              </a:rPr>
+              <a:t>Figure A2. Year-on-year growth: boom, 2025 pause, 2026 re-acceleration</a:t>
+            </a:r>
+          </a:p>
+        </p:txBody>
+      </p:sp>
+      <p:pic>
+        <p:nvPicPr>
+          <p:cNvPr id="3" name="Picture 2" descr="fig_rppi_yoy.png"/>
+          <p:cNvPicPr>
+            <a:picLocks noChangeAspect="1"/>
+          </p:cNvPicPr>
+          <p:nvPr/>
+        </p:nvPicPr>
+        <p:blipFill>
+          <a:blip r:embed="rId2"/>
+          <a:stretch>
+            <a:fillRect/>
+          </a:stretch>
+        </p:blipFill>
+        <p:spPr>
+          <a:xfrm>
+            <a:off x="746607" y="1188720"/>
+            <a:ext cx="10698480" cy="4369058"/>
+          </a:xfrm>
+          <a:prstGeom prst="rect">
+            <a:avLst/>
+          </a:prstGeom>
+        </p:spPr>
+      </p:pic>
+      <p:sp>
+        <p:nvSpPr>
+          <p:cNvPr id="4" name="TextBox 3"/>
+          <p:cNvSpPr txBox="1"/>
+          <p:nvPr/>
+        </p:nvSpPr>
+        <p:spPr>
+          <a:xfrm>
+            <a:off x="548640" y="5667506"/>
+            <a:ext cx="11064240" cy="365760"/>
+          </a:xfrm>
+          <a:prstGeom prst="rect">
+            <a:avLst/>
+          </a:prstGeom>
+          <a:noFill/>
+        </p:spPr>
+        <p:txBody>
+          <a:bodyPr wrap="square" lIns="0" rIns="0" tIns="0" bIns="0" anchor="t">
+            <a:spAutoFit/>
+          </a:bodyPr>
+          <a:lstStyle/>
+          <a:p>
+            <a:pPr algn="ctr">
+              <a:lnSpc>
+                <a:spcPct val="115000"/>
+              </a:lnSpc>
+            </a:pPr>
+            <a:r>
+              <a:rPr sz="1200" b="0">
+                <a:solidFill>
+                  <a:srgbClr val="000000"/>
+                </a:solidFill>
+                <a:latin typeface="Helvetica"/>
+              </a:rPr>
+              <a:t>RPPI, percent change on the same quarter a year earlier; 2026Q2: +12.0 percent.</a:t>
+            </a:r>
+          </a:p>
+        </p:txBody>
+      </p:sp>
+      <p:sp>
+        <p:nvSpPr>
+          <p:cNvPr id="5" name="TextBox 4"/>
+          <p:cNvSpPr txBox="1"/>
+          <p:nvPr/>
+        </p:nvSpPr>
+        <p:spPr>
+          <a:xfrm>
+            <a:off x="548640" y="5987546"/>
+            <a:ext cx="11064240" cy="365760"/>
+          </a:xfrm>
+          <a:prstGeom prst="rect">
+            <a:avLst/>
+          </a:prstGeom>
+          <a:noFill/>
+        </p:spPr>
+        <p:txBody>
+          <a:bodyPr wrap="square" lIns="0" rIns="0" tIns="0" bIns="0" anchor="t">
+            <a:spAutoFit/>
+          </a:bodyPr>
+          <a:lstStyle/>
+          <a:p>
+            <a:pPr algn="ctr">
+              <a:lnSpc>
+                <a:spcPct val="115000"/>
+              </a:lnSpc>
+            </a:pPr>
+            <a:r>
+              <a:rPr sz="1000" b="0">
+                <a:solidFill>
+                  <a:srgbClr val="666666"/>
+                </a:solidFill>
+                <a:latin typeface="Helvetica"/>
+              </a:rPr>
+              <a:t>Source: CBA RPPI data export; staff calculations.</a:t>
+            </a:r>
+          </a:p>
+        </p:txBody>
+      </p:sp>
+      <p:sp>
+        <p:nvSpPr>
+          <p:cNvPr id="6" name="TextBox 5"/>
+          <p:cNvSpPr txBox="1"/>
+          <p:nvPr/>
+        </p:nvSpPr>
+        <p:spPr>
+          <a:xfrm>
+            <a:off x="11430000" y="6537960"/>
+            <a:ext cx="640080" cy="274320"/>
+          </a:xfrm>
+          <a:prstGeom prst="rect">
+            <a:avLst/>
+          </a:prstGeom>
+          <a:noFill/>
+        </p:spPr>
+        <p:txBody>
+          <a:bodyPr wrap="square" lIns="0" rIns="0" tIns="0" bIns="0" anchor="t">
+            <a:spAutoFit/>
+          </a:bodyPr>
+          <a:lstStyle/>
+          <a:p>
+            <a:pPr algn="r">
+              <a:lnSpc>
+                <a:spcPct val="115000"/>
+              </a:lnSpc>
+            </a:pPr>
+            <a:r>
+              <a:rPr sz="1000" b="0">
+                <a:solidFill>
+                  <a:srgbClr val="AAAAAA"/>
+                </a:solidFill>
+                <a:latin typeface="Helvetica"/>
+              </a:rPr>
+              <a:t>18</a:t>
+            </a:r>
+          </a:p>
+        </p:txBody>
+      </p:sp>
+    </p:spTree>
+  </p:cSld>
+  <p:clrMapOvr>
+    <a:masterClrMapping/>
+  </p:clrMapOvr>
+</p:sld>
+</file>
+
+<file path=ppt/slides/slide19.xml><?xml version="1.0" encoding="utf-8"?>
+<p:sld xmlns:a="http://schemas.openxmlformats.org/drawingml/2006/main" xmlns:p="http://schemas.openxmlformats.org/presentationml/2006/main" xmlns:r="http://schemas.openxmlformats.org/officeDocument/2006/relationships">
+  <p:cSld>
+    <p:spTree>
+      <p:nvGrpSpPr>
+        <p:cNvPr id="1" name=""/>
+        <p:cNvGrpSpPr/>
+        <p:nvPr/>
+      </p:nvGrpSpPr>
+      <p:grpSpPr/>
+      <p:sp>
+        <p:nvSpPr>
+          <p:cNvPr id="2" name="TextBox 1"/>
+          <p:cNvSpPr txBox="1"/>
+          <p:nvPr/>
+        </p:nvSpPr>
+        <p:spPr>
+          <a:xfrm>
+            <a:off x="548640" y="365760"/>
+            <a:ext cx="10972800" cy="822960"/>
+          </a:xfrm>
+          <a:prstGeom prst="rect">
+            <a:avLst/>
+          </a:prstGeom>
+          <a:noFill/>
+        </p:spPr>
+        <p:txBody>
+          <a:bodyPr wrap="square" lIns="0" rIns="0" tIns="0" bIns="0" anchor="t">
+            <a:spAutoFit/>
+          </a:bodyPr>
+          <a:lstStyle/>
+          <a:p>
+            <a:pPr algn="l">
+              <a:lnSpc>
+                <a:spcPct val="115000"/>
+              </a:lnSpc>
+            </a:pPr>
+            <a:r>
+              <a:rPr sz="2800" b="1">
+                <a:solidFill>
+                  <a:srgbClr val="1F3A5F"/>
+                </a:solidFill>
+                <a:latin typeface="Helvetica"/>
+              </a:rPr>
+              <a:t>Figure A3. Apartment prices by Yerevan zone</a:t>
+            </a:r>
+          </a:p>
+        </p:txBody>
+      </p:sp>
+      <p:pic>
+        <p:nvPicPr>
+          <p:cNvPr id="3" name="Picture 2" descr="fig_zones.png"/>
+          <p:cNvPicPr>
+            <a:picLocks noChangeAspect="1"/>
+          </p:cNvPicPr>
+          <p:nvPr/>
+        </p:nvPicPr>
+        <p:blipFill>
+          <a:blip r:embed="rId2"/>
+          <a:stretch>
+            <a:fillRect/>
+          </a:stretch>
+        </p:blipFill>
+        <p:spPr>
+          <a:xfrm>
+            <a:off x="1215115" y="1188720"/>
+            <a:ext cx="9761464" cy="4480560"/>
+          </a:xfrm>
+          <a:prstGeom prst="rect">
+            <a:avLst/>
+          </a:prstGeom>
+        </p:spPr>
+      </p:pic>
+      <p:sp>
+        <p:nvSpPr>
+          <p:cNvPr id="4" name="TextBox 3"/>
+          <p:cNvSpPr txBox="1"/>
+          <p:nvPr/>
+        </p:nvSpPr>
+        <p:spPr>
+          <a:xfrm>
+            <a:off x="548640" y="5779008"/>
+            <a:ext cx="11064240" cy="365760"/>
+          </a:xfrm>
+          <a:prstGeom prst="rect">
+            <a:avLst/>
+          </a:prstGeom>
+          <a:noFill/>
+        </p:spPr>
+        <p:txBody>
+          <a:bodyPr wrap="square" lIns="0" rIns="0" tIns="0" bIns="0" anchor="t">
+            <a:spAutoFit/>
+          </a:bodyPr>
+          <a:lstStyle/>
+          <a:p>
+            <a:pPr algn="ctr">
+              <a:lnSpc>
+                <a:spcPct val="115000"/>
+              </a:lnSpc>
+            </a:pPr>
+            <a:r>
+              <a:rPr sz="1200" b="0">
+                <a:solidFill>
+                  <a:srgbClr val="000000"/>
+                </a:solidFill>
+                <a:latin typeface="Helvetica"/>
+              </a:rPr>
+              <a:t>Apartment price index by Yerevan zone (2018 = 100); Yerevan-Center +24.0 percent y/y in 2026Q2.</a:t>
+            </a:r>
+          </a:p>
+        </p:txBody>
+      </p:sp>
+      <p:sp>
+        <p:nvSpPr>
+          <p:cNvPr id="5" name="TextBox 4"/>
+          <p:cNvSpPr txBox="1"/>
+          <p:nvPr/>
+        </p:nvSpPr>
+        <p:spPr>
+          <a:xfrm>
+            <a:off x="548640" y="6099048"/>
+            <a:ext cx="11064240" cy="365760"/>
+          </a:xfrm>
+          <a:prstGeom prst="rect">
+            <a:avLst/>
+          </a:prstGeom>
+          <a:noFill/>
+        </p:spPr>
+        <p:txBody>
+          <a:bodyPr wrap="square" lIns="0" rIns="0" tIns="0" bIns="0" anchor="t">
+            <a:spAutoFit/>
+          </a:bodyPr>
+          <a:lstStyle/>
+          <a:p>
+            <a:pPr algn="ctr">
+              <a:lnSpc>
+                <a:spcPct val="115000"/>
+              </a:lnSpc>
+            </a:pPr>
+            <a:r>
+              <a:rPr sz="1000" b="0">
+                <a:solidFill>
+                  <a:srgbClr val="666666"/>
+                </a:solidFill>
+                <a:latin typeface="Helvetica"/>
+              </a:rPr>
+              <a:t>Source: CBA RPPI data export.</a:t>
+            </a:r>
+          </a:p>
+        </p:txBody>
+      </p:sp>
+      <p:sp>
+        <p:nvSpPr>
+          <p:cNvPr id="6" name="TextBox 5"/>
+          <p:cNvSpPr txBox="1"/>
+          <p:nvPr/>
+        </p:nvSpPr>
+        <p:spPr>
+          <a:xfrm>
+            <a:off x="11430000" y="6537960"/>
+            <a:ext cx="640080" cy="274320"/>
+          </a:xfrm>
+          <a:prstGeom prst="rect">
+            <a:avLst/>
+          </a:prstGeom>
+          <a:noFill/>
+        </p:spPr>
+        <p:txBody>
+          <a:bodyPr wrap="square" lIns="0" rIns="0" tIns="0" bIns="0" anchor="t">
+            <a:spAutoFit/>
+          </a:bodyPr>
+          <a:lstStyle/>
+          <a:p>
+            <a:pPr algn="r">
+              <a:lnSpc>
+                <a:spcPct val="115000"/>
+              </a:lnSpc>
+            </a:pPr>
+            <a:r>
+              <a:rPr sz="1000" b="0">
+                <a:solidFill>
+                  <a:srgbClr val="AAAAAA"/>
+                </a:solidFill>
+                <a:latin typeface="Helvetica"/>
+              </a:rPr>
+              <a:t>19</a:t>
+            </a:r>
+          </a:p>
+        </p:txBody>
+      </p:sp>
+    </p:spTree>
+  </p:cSld>
+  <p:clrMapOvr>
+    <a:masterClrMapping/>
+  </p:clrMapOvr>
+</p:sld>
+</file>
+
 <file path=ppt/slides/slide2.xml><?xml version="1.0" encoding="utf-8"?>
 <p:sld xmlns:a="http://schemas.openxmlformats.org/drawingml/2006/main" xmlns:p="http://schemas.openxmlformats.org/presentationml/2006/main" xmlns:r="http://schemas.openxmlformats.org/officeDocument/2006/relationships">
   <p:cSld>
@@ -4934,6 +5670,600 @@
                 <a:latin typeface="Helvetica"/>
               </a:rPr>
               <a:t>2</a:t>
+            </a:r>
+          </a:p>
+        </p:txBody>
+      </p:sp>
+    </p:spTree>
+  </p:cSld>
+  <p:clrMapOvr>
+    <a:masterClrMapping/>
+  </p:clrMapOvr>
+</p:sld>
+</file>
+
+<file path=ppt/slides/slide20.xml><?xml version="1.0" encoding="utf-8"?>
+<p:sld xmlns:a="http://schemas.openxmlformats.org/drawingml/2006/main" xmlns:p="http://schemas.openxmlformats.org/presentationml/2006/main" xmlns:r="http://schemas.openxmlformats.org/officeDocument/2006/relationships">
+  <p:cSld>
+    <p:spTree>
+      <p:nvGrpSpPr>
+        <p:cNvPr id="1" name=""/>
+        <p:cNvGrpSpPr/>
+        <p:nvPr/>
+      </p:nvGrpSpPr>
+      <p:grpSpPr/>
+      <p:sp>
+        <p:nvSpPr>
+          <p:cNvPr id="2" name="TextBox 1"/>
+          <p:cNvSpPr txBox="1"/>
+          <p:nvPr/>
+        </p:nvSpPr>
+        <p:spPr>
+          <a:xfrm>
+            <a:off x="548640" y="365760"/>
+            <a:ext cx="10972800" cy="822960"/>
+          </a:xfrm>
+          <a:prstGeom prst="rect">
+            <a:avLst/>
+          </a:prstGeom>
+          <a:noFill/>
+        </p:spPr>
+        <p:txBody>
+          <a:bodyPr wrap="square" lIns="0" rIns="0" tIns="0" bIns="0" anchor="t">
+            <a:spAutoFit/>
+          </a:bodyPr>
+          <a:lstStyle/>
+          <a:p>
+            <a:pPr algn="l">
+              <a:lnSpc>
+                <a:spcPct val="115000"/>
+              </a:lnSpc>
+            </a:pPr>
+            <a:r>
+              <a:rPr sz="2800" b="1">
+                <a:solidFill>
+                  <a:srgbClr val="1F3A5F"/>
+                </a:solidFill>
+                <a:latin typeface="Helvetica"/>
+              </a:rPr>
+              <a:t>Figure A4. Transactions at record levels</a:t>
+            </a:r>
+          </a:p>
+        </p:txBody>
+      </p:sp>
+      <p:pic>
+        <p:nvPicPr>
+          <p:cNvPr id="3" name="Picture 2" descr="fig_tx.png"/>
+          <p:cNvPicPr>
+            <a:picLocks noChangeAspect="1"/>
+          </p:cNvPicPr>
+          <p:nvPr/>
+        </p:nvPicPr>
+        <p:blipFill>
+          <a:blip r:embed="rId2"/>
+          <a:stretch>
+            <a:fillRect/>
+          </a:stretch>
+        </p:blipFill>
+        <p:spPr>
+          <a:xfrm>
+            <a:off x="746607" y="1188720"/>
+            <a:ext cx="10698480" cy="4369058"/>
+          </a:xfrm>
+          <a:prstGeom prst="rect">
+            <a:avLst/>
+          </a:prstGeom>
+        </p:spPr>
+      </p:pic>
+      <p:sp>
+        <p:nvSpPr>
+          <p:cNvPr id="4" name="TextBox 3"/>
+          <p:cNvSpPr txBox="1"/>
+          <p:nvPr/>
+        </p:nvSpPr>
+        <p:spPr>
+          <a:xfrm>
+            <a:off x="548640" y="5667506"/>
+            <a:ext cx="11064240" cy="365760"/>
+          </a:xfrm>
+          <a:prstGeom prst="rect">
+            <a:avLst/>
+          </a:prstGeom>
+          <a:noFill/>
+        </p:spPr>
+        <p:txBody>
+          <a:bodyPr wrap="square" lIns="0" rIns="0" tIns="0" bIns="0" anchor="t">
+            <a:spAutoFit/>
+          </a:bodyPr>
+          <a:lstStyle/>
+          <a:p>
+            <a:pPr algn="ctr">
+              <a:lnSpc>
+                <a:spcPct val="115000"/>
+              </a:lnSpc>
+            </a:pPr>
+            <a:r>
+              <a:rPr sz="1200" b="0">
+                <a:solidFill>
+                  <a:srgbClr val="000000"/>
+                </a:solidFill>
+                <a:latin typeface="Helvetica"/>
+              </a:rPr>
+              <a:t>Residential property sale transactions per quarter; 2026Q2: 8,497 deals worth AMD 289.7 billion.</a:t>
+            </a:r>
+          </a:p>
+        </p:txBody>
+      </p:sp>
+      <p:sp>
+        <p:nvSpPr>
+          <p:cNvPr id="5" name="TextBox 4"/>
+          <p:cNvSpPr txBox="1"/>
+          <p:nvPr/>
+        </p:nvSpPr>
+        <p:spPr>
+          <a:xfrm>
+            <a:off x="548640" y="5987546"/>
+            <a:ext cx="11064240" cy="365760"/>
+          </a:xfrm>
+          <a:prstGeom prst="rect">
+            <a:avLst/>
+          </a:prstGeom>
+          <a:noFill/>
+        </p:spPr>
+        <p:txBody>
+          <a:bodyPr wrap="square" lIns="0" rIns="0" tIns="0" bIns="0" anchor="t">
+            <a:spAutoFit/>
+          </a:bodyPr>
+          <a:lstStyle/>
+          <a:p>
+            <a:pPr algn="ctr">
+              <a:lnSpc>
+                <a:spcPct val="115000"/>
+              </a:lnSpc>
+            </a:pPr>
+            <a:r>
+              <a:rPr sz="1000" b="0">
+                <a:solidFill>
+                  <a:srgbClr val="666666"/>
+                </a:solidFill>
+                <a:latin typeface="Helvetica"/>
+              </a:rPr>
+              <a:t>Source: CBA RPPI data export.</a:t>
+            </a:r>
+          </a:p>
+        </p:txBody>
+      </p:sp>
+      <p:sp>
+        <p:nvSpPr>
+          <p:cNvPr id="6" name="TextBox 5"/>
+          <p:cNvSpPr txBox="1"/>
+          <p:nvPr/>
+        </p:nvSpPr>
+        <p:spPr>
+          <a:xfrm>
+            <a:off x="11430000" y="6537960"/>
+            <a:ext cx="640080" cy="274320"/>
+          </a:xfrm>
+          <a:prstGeom prst="rect">
+            <a:avLst/>
+          </a:prstGeom>
+          <a:noFill/>
+        </p:spPr>
+        <p:txBody>
+          <a:bodyPr wrap="square" lIns="0" rIns="0" tIns="0" bIns="0" anchor="t">
+            <a:spAutoFit/>
+          </a:bodyPr>
+          <a:lstStyle/>
+          <a:p>
+            <a:pPr algn="r">
+              <a:lnSpc>
+                <a:spcPct val="115000"/>
+              </a:lnSpc>
+            </a:pPr>
+            <a:r>
+              <a:rPr sz="1000" b="0">
+                <a:solidFill>
+                  <a:srgbClr val="AAAAAA"/>
+                </a:solidFill>
+                <a:latin typeface="Helvetica"/>
+              </a:rPr>
+              <a:t>20</a:t>
+            </a:r>
+          </a:p>
+        </p:txBody>
+      </p:sp>
+    </p:spTree>
+  </p:cSld>
+  <p:clrMapOvr>
+    <a:masterClrMapping/>
+  </p:clrMapOvr>
+</p:sld>
+</file>
+
+<file path=ppt/slides/slide21.xml><?xml version="1.0" encoding="utf-8"?>
+<p:sld xmlns:a="http://schemas.openxmlformats.org/drawingml/2006/main" xmlns:p="http://schemas.openxmlformats.org/presentationml/2006/main" xmlns:r="http://schemas.openxmlformats.org/officeDocument/2006/relationships">
+  <p:cSld>
+    <p:spTree>
+      <p:nvGrpSpPr>
+        <p:cNvPr id="1" name=""/>
+        <p:cNvGrpSpPr/>
+        <p:nvPr/>
+      </p:nvGrpSpPr>
+      <p:grpSpPr/>
+      <p:sp>
+        <p:nvSpPr>
+          <p:cNvPr id="2" name="TextBox 1"/>
+          <p:cNvSpPr txBox="1"/>
+          <p:nvPr/>
+        </p:nvSpPr>
+        <p:spPr>
+          <a:xfrm>
+            <a:off x="548640" y="365760"/>
+            <a:ext cx="10972800" cy="822960"/>
+          </a:xfrm>
+          <a:prstGeom prst="rect">
+            <a:avLst/>
+          </a:prstGeom>
+          <a:noFill/>
+        </p:spPr>
+        <p:txBody>
+          <a:bodyPr wrap="square" lIns="0" rIns="0" tIns="0" bIns="0" anchor="t">
+            <a:spAutoFit/>
+          </a:bodyPr>
+          <a:lstStyle/>
+          <a:p>
+            <a:pPr algn="l">
+              <a:lnSpc>
+                <a:spcPct val="115000"/>
+              </a:lnSpc>
+            </a:pPr>
+            <a:r>
+              <a:rPr sz="2800" b="1">
+                <a:solidFill>
+                  <a:srgbClr val="1F3A5F"/>
+                </a:solidFill>
+                <a:latin typeface="Helvetica"/>
+              </a:rPr>
+              <a:t>Figure A5. The new-build premium by district</a:t>
+            </a:r>
+          </a:p>
+        </p:txBody>
+      </p:sp>
+      <p:pic>
+        <p:nvPicPr>
+          <p:cNvPr id="3" name="Picture 2" descr="fig_nb.png"/>
+          <p:cNvPicPr>
+            <a:picLocks noChangeAspect="1"/>
+          </p:cNvPicPr>
+          <p:nvPr/>
+        </p:nvPicPr>
+        <p:blipFill>
+          <a:blip r:embed="rId2"/>
+          <a:stretch>
+            <a:fillRect/>
+          </a:stretch>
+        </p:blipFill>
+        <p:spPr>
+          <a:xfrm>
+            <a:off x="2239524" y="1188720"/>
+            <a:ext cx="7712647" cy="4480560"/>
+          </a:xfrm>
+          <a:prstGeom prst="rect">
+            <a:avLst/>
+          </a:prstGeom>
+        </p:spPr>
+      </p:pic>
+      <p:sp>
+        <p:nvSpPr>
+          <p:cNvPr id="4" name="TextBox 3"/>
+          <p:cNvSpPr txBox="1"/>
+          <p:nvPr/>
+        </p:nvSpPr>
+        <p:spPr>
+          <a:xfrm>
+            <a:off x="548640" y="5779008"/>
+            <a:ext cx="11064240" cy="365760"/>
+          </a:xfrm>
+          <a:prstGeom prst="rect">
+            <a:avLst/>
+          </a:prstGeom>
+          <a:noFill/>
+        </p:spPr>
+        <p:txBody>
+          <a:bodyPr wrap="square" lIns="0" rIns="0" tIns="0" bIns="0" anchor="t">
+            <a:spAutoFit/>
+          </a:bodyPr>
+          <a:lstStyle/>
+          <a:p>
+            <a:pPr algn="ctr">
+              <a:lnSpc>
+                <a:spcPct val="115000"/>
+              </a:lnSpc>
+            </a:pPr>
+            <a:r>
+              <a:rPr sz="1200" b="0">
+                <a:solidFill>
+                  <a:srgbClr val="000000"/>
+                </a:solidFill>
+                <a:latin typeface="Helvetica"/>
+              </a:rPr>
+              <a:t>Secondary-market average vs. new-build minimum asking, AMD thousands per sq m, mid-2026.</a:t>
+            </a:r>
+          </a:p>
+        </p:txBody>
+      </p:sp>
+      <p:sp>
+        <p:nvSpPr>
+          <p:cNvPr id="5" name="TextBox 4"/>
+          <p:cNvSpPr txBox="1"/>
+          <p:nvPr/>
+        </p:nvSpPr>
+        <p:spPr>
+          <a:xfrm>
+            <a:off x="548640" y="6099048"/>
+            <a:ext cx="11064240" cy="365760"/>
+          </a:xfrm>
+          <a:prstGeom prst="rect">
+            <a:avLst/>
+          </a:prstGeom>
+          <a:noFill/>
+        </p:spPr>
+        <p:txBody>
+          <a:bodyPr wrap="square" lIns="0" rIns="0" tIns="0" bIns="0" anchor="t">
+            <a:spAutoFit/>
+          </a:bodyPr>
+          <a:lstStyle/>
+          <a:p>
+            <a:pPr algn="ctr">
+              <a:lnSpc>
+                <a:spcPct val="115000"/>
+              </a:lnSpc>
+            </a:pPr>
+            <a:r>
+              <a:rPr sz="1000" b="0">
+                <a:solidFill>
+                  <a:srgbClr val="666666"/>
+                </a:solidFill>
+                <a:latin typeface="Helvetica"/>
+              </a:rPr>
+              <a:t>Sources: b24.am district tables (Jun 2026); karucapatoxic.am new-build asking prices (Jul 2026).</a:t>
+            </a:r>
+          </a:p>
+        </p:txBody>
+      </p:sp>
+      <p:sp>
+        <p:nvSpPr>
+          <p:cNvPr id="6" name="TextBox 5"/>
+          <p:cNvSpPr txBox="1"/>
+          <p:nvPr/>
+        </p:nvSpPr>
+        <p:spPr>
+          <a:xfrm>
+            <a:off x="11430000" y="6537960"/>
+            <a:ext cx="640080" cy="274320"/>
+          </a:xfrm>
+          <a:prstGeom prst="rect">
+            <a:avLst/>
+          </a:prstGeom>
+          <a:noFill/>
+        </p:spPr>
+        <p:txBody>
+          <a:bodyPr wrap="square" lIns="0" rIns="0" tIns="0" bIns="0" anchor="t">
+            <a:spAutoFit/>
+          </a:bodyPr>
+          <a:lstStyle/>
+          <a:p>
+            <a:pPr algn="r">
+              <a:lnSpc>
+                <a:spcPct val="115000"/>
+              </a:lnSpc>
+            </a:pPr>
+            <a:r>
+              <a:rPr sz="1000" b="0">
+                <a:solidFill>
+                  <a:srgbClr val="AAAAAA"/>
+                </a:solidFill>
+                <a:latin typeface="Helvetica"/>
+              </a:rPr>
+              <a:t>21</a:t>
+            </a:r>
+          </a:p>
+        </p:txBody>
+      </p:sp>
+    </p:spTree>
+  </p:cSld>
+  <p:clrMapOvr>
+    <a:masterClrMapping/>
+  </p:clrMapOvr>
+</p:sld>
+</file>
+
+<file path=ppt/slides/slide22.xml><?xml version="1.0" encoding="utf-8"?>
+<p:sld xmlns:a="http://schemas.openxmlformats.org/drawingml/2006/main" xmlns:p="http://schemas.openxmlformats.org/presentationml/2006/main" xmlns:r="http://schemas.openxmlformats.org/officeDocument/2006/relationships">
+  <p:cSld>
+    <p:spTree>
+      <p:nvGrpSpPr>
+        <p:cNvPr id="1" name=""/>
+        <p:cNvGrpSpPr/>
+        <p:nvPr/>
+      </p:nvGrpSpPr>
+      <p:grpSpPr/>
+      <p:sp>
+        <p:nvSpPr>
+          <p:cNvPr id="2" name="TextBox 1"/>
+          <p:cNvSpPr txBox="1"/>
+          <p:nvPr/>
+        </p:nvSpPr>
+        <p:spPr>
+          <a:xfrm>
+            <a:off x="548640" y="365760"/>
+            <a:ext cx="10972800" cy="822960"/>
+          </a:xfrm>
+          <a:prstGeom prst="rect">
+            <a:avLst/>
+          </a:prstGeom>
+          <a:noFill/>
+        </p:spPr>
+        <p:txBody>
+          <a:bodyPr wrap="square" lIns="0" rIns="0" tIns="0" bIns="0" anchor="t">
+            <a:spAutoFit/>
+          </a:bodyPr>
+          <a:lstStyle/>
+          <a:p>
+            <a:pPr algn="l">
+              <a:lnSpc>
+                <a:spcPct val="115000"/>
+              </a:lnSpc>
+            </a:pPr>
+            <a:r>
+              <a:rPr sz="2800" b="1">
+                <a:solidFill>
+                  <a:srgbClr val="1F3A5F"/>
+                </a:solidFill>
+                <a:latin typeface="Helvetica"/>
+              </a:rPr>
+              <a:t>Figure A6. Macro backdrop: IMF WEO series and projections</a:t>
+            </a:r>
+          </a:p>
+        </p:txBody>
+      </p:sp>
+      <p:pic>
+        <p:nvPicPr>
+          <p:cNvPr id="3" name="Picture 2" descr="fig_weo.png"/>
+          <p:cNvPicPr>
+            <a:picLocks noChangeAspect="1"/>
+          </p:cNvPicPr>
+          <p:nvPr/>
+        </p:nvPicPr>
+        <p:blipFill>
+          <a:blip r:embed="rId2"/>
+          <a:stretch>
+            <a:fillRect/>
+          </a:stretch>
+        </p:blipFill>
+        <p:spPr>
+          <a:xfrm>
+            <a:off x="1960169" y="1188720"/>
+            <a:ext cx="8271357" cy="4480560"/>
+          </a:xfrm>
+          <a:prstGeom prst="rect">
+            <a:avLst/>
+          </a:prstGeom>
+        </p:spPr>
+      </p:pic>
+      <p:sp>
+        <p:nvSpPr>
+          <p:cNvPr id="4" name="TextBox 3"/>
+          <p:cNvSpPr txBox="1"/>
+          <p:nvPr/>
+        </p:nvSpPr>
+        <p:spPr>
+          <a:xfrm>
+            <a:off x="548640" y="5779008"/>
+            <a:ext cx="11064240" cy="365760"/>
+          </a:xfrm>
+          <a:prstGeom prst="rect">
+            <a:avLst/>
+          </a:prstGeom>
+          <a:noFill/>
+        </p:spPr>
+        <p:txBody>
+          <a:bodyPr wrap="square" lIns="0" rIns="0" tIns="0" bIns="0" anchor="t">
+            <a:spAutoFit/>
+          </a:bodyPr>
+          <a:lstStyle/>
+          <a:p>
+            <a:pPr algn="ctr">
+              <a:lnSpc>
+                <a:spcPct val="115000"/>
+              </a:lnSpc>
+            </a:pPr>
+            <a:r>
+              <a:rPr sz="1200" b="0">
+                <a:solidFill>
+                  <a:srgbClr val="000000"/>
+                </a:solidFill>
+                <a:latin typeface="Helvetica"/>
+              </a:rPr>
+              <a:t>Growth, inflation, current account, and debt, 2015 to 2031; projections from 2026.</a:t>
+            </a:r>
+          </a:p>
+        </p:txBody>
+      </p:sp>
+      <p:sp>
+        <p:nvSpPr>
+          <p:cNvPr id="5" name="TextBox 4"/>
+          <p:cNvSpPr txBox="1"/>
+          <p:nvPr/>
+        </p:nvSpPr>
+        <p:spPr>
+          <a:xfrm>
+            <a:off x="548640" y="6099048"/>
+            <a:ext cx="11064240" cy="365760"/>
+          </a:xfrm>
+          <a:prstGeom prst="rect">
+            <a:avLst/>
+          </a:prstGeom>
+          <a:noFill/>
+        </p:spPr>
+        <p:txBody>
+          <a:bodyPr wrap="square" lIns="0" rIns="0" tIns="0" bIns="0" anchor="t">
+            <a:spAutoFit/>
+          </a:bodyPr>
+          <a:lstStyle/>
+          <a:p>
+            <a:pPr algn="ctr">
+              <a:lnSpc>
+                <a:spcPct val="115000"/>
+              </a:lnSpc>
+            </a:pPr>
+            <a:r>
+              <a:rPr sz="1000" b="0">
+                <a:solidFill>
+                  <a:srgbClr val="666666"/>
+                </a:solidFill>
+                <a:latin typeface="Helvetica"/>
+              </a:rPr>
+              <a:t>Source: IMF World Economic Outlook database, April 2026.</a:t>
+            </a:r>
+          </a:p>
+        </p:txBody>
+      </p:sp>
+      <p:sp>
+        <p:nvSpPr>
+          <p:cNvPr id="6" name="TextBox 5"/>
+          <p:cNvSpPr txBox="1"/>
+          <p:nvPr/>
+        </p:nvSpPr>
+        <p:spPr>
+          <a:xfrm>
+            <a:off x="11430000" y="6537960"/>
+            <a:ext cx="640080" cy="274320"/>
+          </a:xfrm>
+          <a:prstGeom prst="rect">
+            <a:avLst/>
+          </a:prstGeom>
+          <a:noFill/>
+        </p:spPr>
+        <p:txBody>
+          <a:bodyPr wrap="square" lIns="0" rIns="0" tIns="0" bIns="0" anchor="t">
+            <a:spAutoFit/>
+          </a:bodyPr>
+          <a:lstStyle/>
+          <a:p>
+            <a:pPr algn="r">
+              <a:lnSpc>
+                <a:spcPct val="115000"/>
+              </a:lnSpc>
+            </a:pPr>
+            <a:r>
+              <a:rPr sz="1000" b="0">
+                <a:solidFill>
+                  <a:srgbClr val="AAAAAA"/>
+                </a:solidFill>
+                <a:latin typeface="Helvetica"/>
+              </a:rPr>
+              <a:t>22</a:t>
             </a:r>
           </a:p>
         </p:txBody>

--- a/Yerevan-Housing-Market-Slides.pptx
+++ b/Yerevan-Housing-Market-Slides.pptx
@@ -27,6 +27,8 @@
     <p:sldId id="275" r:id="rId26"/>
     <p:sldId id="276" r:id="rId27"/>
     <p:sldId id="277" r:id="rId28"/>
+    <p:sldId id="278" r:id="rId29"/>
+    <p:sldId id="279" r:id="rId30"/>
   </p:sldIdLst>
   <p:sldSz cx="12191695" cy="6858000" type="screen4x3"/>
   <p:notesSz cx="6858000" cy="9144000"/>
@@ -3317,7 +3319,7 @@
                 </a:solidFill>
                 <a:latin typeface="Helvetica"/>
               </a:rPr>
-              <a:t>6. Rents: spike, correction, settled well above pre-war</a:t>
+              <a:t>6. Named neighborhoods: where growth is concentrating</a:t>
             </a:r>
           </a:p>
         </p:txBody>
@@ -3364,7 +3366,7 @@
                 </a:solidFill>
                 <a:latin typeface="Helvetica"/>
               </a:rPr>
-              <a:t>2022: rents doubled to tripled within months of the Russian influx; central 2-3 room units went from AMD 140,000 to 180,000 to peaks of 400,000 to 500,000.</a:t>
+              <a:t>Halabyan-Abelyan / Norashen (Ajapnyak): metro station #11 with a 152 m gorge bridge (design done, investment-committee approval Jul 2026, no contractor yet) plus the TUMO engineering campus; new-builds US$850 to 1,630 per sq m; the district led 2025 at +13.7 percent. Best catalyst-per-dollar in the city.</a:t>
             </a:r>
           </a:p>
           <a:p>
@@ -3388,7 +3390,7 @@
                 </a:solidFill>
                 <a:latin typeface="Helvetica"/>
               </a:rPr>
-              <a:t>2023-24: roughly 30 to 40 percent correction as relocants departed; Karabakh refugees offset at far lower purchasing power.</a:t>
+              <a:t>Rubinyants / Paruyr Sevak / Gogol cluster (Kanaker-Zeytun): 10+ active projects at US$1,280 to 1,850; Arabkir spillover and the tech corridor. The "Arabkir at a discount" play.</a:t>
             </a:r>
           </a:p>
           <a:p>
@@ -3412,7 +3414,7 @@
                 </a:solidFill>
                 <a:latin typeface="Helvetica"/>
               </a:rPr>
-              <a:t>Now: central one-bedroom US$550 to 850; most-demanded bracket US$300 to 500; tenant shortage in the US$1,000+ premium tier; rental transactions -28.6 percent in 2025.</a:t>
+              <a:t>Noragyugh fringe (Kentron, gorge edge): "Yerevan Downtown" approved Jan 2026 (81 ha, about 155 buildings incl. 70-storey towers, acquisitions at market +30 percent) but no financing signed. Buy adjacent streets outside the acquisition zone for optionality.</a:t>
             </a:r>
           </a:p>
           <a:p>
@@ -3436,7 +3438,7 @@
                 </a:solidFill>
                 <a:latin typeface="Helvetica"/>
               </a:rPr>
-              <a:t>Rents settled 50 to 80 percent above pre-war; realtors' consensus is they will not return to 2021 levels.</a:t>
+              <a:t>Davtashen / Pirumyanner: fifth Hrazdan bridge and Babajanyan-Ashtarak road near completion; US$1,470 to 2,180; the lower-beta family compounder.</a:t>
             </a:r>
           </a:p>
           <a:p>
@@ -3460,31 +3462,7 @@
                 </a:solidFill>
                 <a:latin typeface="Helvetica"/>
               </a:rPr>
-              <a:t>Gross yields: 5.5 to 7 percent in the center, 7 to 10 percent in Arabkir and the mid-ring; net about 1.5 to 2 points lower.</a:t>
-            </a:r>
-          </a:p>
-          <a:p>
-            <a:pPr algn="l" marL="411480" indent="-292608">
-              <a:lnSpc>
-                <a:spcPct val="130000"/>
-              </a:lnSpc>
-              <a:spcAft>
-                <a:spcPts val="600"/>
-              </a:spcAft>
-              <a:buClr>
-                <a:srgbClr val="1F3A5F"/>
-              </a:buClr>
-              <a:buFont typeface="Arial"/>
-              <a:buChar char="▸"/>
-            </a:pPr>
-            <a:r>
-              <a:rPr sz="1800" b="0">
-                <a:solidFill>
-                  <a:srgbClr val="000000"/>
-                </a:solidFill>
-                <a:latin typeface="Helvetica"/>
-              </a:rPr>
-              <a:t>CBA governor: price-to-rent ratio rising, investment attractiveness declining.</a:t>
+              <a:t>Already priced: Arshakunyats corridor (Shengavit) new-builds at US$1,650 to 2,310, the dearest outside the center while its secondary market dipped in 2025; Dalma/Tsitsernakaberd mid-late premium; Firdus finished at up to US$5,000 per sq m.</a:t>
             </a:r>
           </a:p>
         </p:txBody>
@@ -3580,45 +3558,21 @@
                 </a:solidFill>
                 <a:latin typeface="Helvetica"/>
               </a:rPr>
-              <a:t>Figure 4. Central Yerevan one-bedroom rent</a:t>
-            </a:r>
-          </a:p>
-        </p:txBody>
-      </p:sp>
-      <p:pic>
-        <p:nvPicPr>
-          <p:cNvPr id="3" name="Picture 2" descr="fig3_rent.png"/>
-          <p:cNvPicPr>
-            <a:picLocks noChangeAspect="1"/>
-          </p:cNvPicPr>
-          <p:nvPr/>
-        </p:nvPicPr>
-        <p:blipFill>
-          <a:blip r:embed="rId2"/>
-          <a:stretch>
-            <a:fillRect/>
-          </a:stretch>
-        </p:blipFill>
-        <p:spPr>
-          <a:xfrm>
-            <a:off x="1942615" y="1188720"/>
-            <a:ext cx="8306465" cy="4480560"/>
-          </a:xfrm>
-          <a:prstGeom prst="rect">
-            <a:avLst/>
-          </a:prstGeom>
-        </p:spPr>
-      </p:pic>
-      <p:sp>
-        <p:nvSpPr>
-          <p:cNvPr id="4" name="TextBox 3"/>
+              <a:t>7. Gentrification watchlist: the rule is groundbreaking, not announcement</a:t>
+            </a:r>
+          </a:p>
+        </p:txBody>
+      </p:sp>
+      <p:sp>
+        <p:nvSpPr>
+          <p:cNvPr id="3" name="TextBox 2"/>
           <p:cNvSpPr txBox="1"/>
           <p:nvPr/>
         </p:nvSpPr>
         <p:spPr>
           <a:xfrm>
-            <a:off x="548640" y="5779008"/>
-            <a:ext cx="11064240" cy="365760"/>
+            <a:off x="640080" y="1280160"/>
+            <a:ext cx="10972800" cy="5120640"/>
           </a:xfrm>
           <a:prstGeom prst="rect">
             <a:avLst/>
@@ -3631,65 +3585,130 @@
           </a:bodyPr>
           <a:lstStyle/>
           <a:p>
-            <a:pPr algn="ctr">
-              <a:lnSpc>
-                <a:spcPct val="115000"/>
-              </a:lnSpc>
-            </a:pPr>
-            <a:r>
-              <a:rPr sz="1200" b="0">
+            <a:pPr algn="l" marL="411480" indent="-292608">
+              <a:lnSpc>
+                <a:spcPct val="130000"/>
+              </a:lnSpc>
+              <a:spcAft>
+                <a:spcPts val="600"/>
+              </a:spcAft>
+              <a:buClr>
+                <a:srgbClr val="1F3A5F"/>
+              </a:buClr>
+              <a:buFont typeface="Arial"/>
+              <a:buChar char="▸"/>
+            </a:pPr>
+            <a:r>
+              <a:rPr sz="1800" b="0">
                 <a:solidFill>
                   <a:srgbClr val="000000"/>
                 </a:solidFill>
                 <a:latin typeface="Helvetica"/>
               </a:rPr>
-              <a:t>Indicative monthly rent, U.S. dollars, 2021 to 2026.</a:t>
-            </a:r>
-          </a:p>
-        </p:txBody>
-      </p:sp>
-      <p:sp>
-        <p:nvSpPr>
-          <p:cNvPr id="5" name="TextBox 4"/>
-          <p:cNvSpPr txBox="1"/>
-          <p:nvPr/>
-        </p:nvSpPr>
-        <p:spPr>
-          <a:xfrm>
-            <a:off x="548640" y="6099048"/>
-            <a:ext cx="11064240" cy="365760"/>
-          </a:xfrm>
-          <a:prstGeom prst="rect">
-            <a:avLst/>
-          </a:prstGeom>
-          <a:noFill/>
-        </p:spPr>
-        <p:txBody>
-          <a:bodyPr wrap="square" lIns="0" rIns="0" tIns="0" bIns="0" anchor="t">
-            <a:spAutoFit/>
-          </a:bodyPr>
-          <a:lstStyle/>
-          <a:p>
-            <a:pPr algn="ctr">
-              <a:lnSpc>
-                <a:spcPct val="115000"/>
-              </a:lnSpc>
-            </a:pPr>
-            <a:r>
-              <a:rPr sz="1000" b="0">
-                <a:solidFill>
-                  <a:srgbClr val="666666"/>
-                </a:solidFill>
-                <a:latin typeface="Helvetica"/>
-              </a:rPr>
-              <a:t>Sources: CivilNet; JAMnews; Mirror-Spectator; Numbeo; staff splicing.</a:t>
-            </a:r>
-          </a:p>
-        </p:txBody>
-      </p:sp>
-      <p:sp>
-        <p:nvSpPr>
-          <p:cNvPr id="6" name="TextBox 5"/>
+              <a:t>Yerevan does not gentrify organically: appreciation follows government mega-decisions (metro decrees, redevelopment programs, campus projects) - which makes the watchlist trackable by named milestones.</a:t>
+            </a:r>
+          </a:p>
+          <a:p>
+            <a:pPr algn="l" marL="411480" indent="-292608">
+              <a:lnSpc>
+                <a:spcPct val="130000"/>
+              </a:lnSpc>
+              <a:spcAft>
+                <a:spcPts val="600"/>
+              </a:spcAft>
+              <a:buClr>
+                <a:srgbClr val="1F3A5F"/>
+              </a:buClr>
+              <a:buFont typeface="Arial"/>
+              <a:buChar char="▸"/>
+            </a:pPr>
+            <a:r>
+              <a:rPr sz="1800" b="0">
+                <a:solidFill>
+                  <a:srgbClr val="000000"/>
+                </a:solidFill>
+                <a:latin typeface="Helvetica"/>
+              </a:rPr>
+              <a:t>Every headline catalyst is approved but unfunded or unbuilt as of mid-2026: the Ajapnyak metro has no contractor, Yerevan Downtown no financing, Kond no action plan, and the Academic City (700 ha, 16 universities, first students 2030) a timeline analysts doubt.</a:t>
+            </a:r>
+          </a:p>
+          <a:p>
+            <a:pPr algn="l" marL="411480" indent="-292608">
+              <a:lnSpc>
+                <a:spcPct val="130000"/>
+              </a:lnSpc>
+              <a:spcAft>
+                <a:spcPts val="600"/>
+              </a:spcAft>
+              <a:buClr>
+                <a:srgbClr val="1F3A5F"/>
+              </a:buClr>
+              <a:buFont typeface="Arial"/>
+              <a:buChar char="▸"/>
+            </a:pPr>
+            <a:r>
+              <a:rPr sz="1800" b="0">
+                <a:solidFill>
+                  <a:srgbClr val="000000"/>
+                </a:solidFill>
+                <a:latin typeface="Helvetica"/>
+              </a:rPr>
+              <a:t>Pre-gentrification, speculative: Kond (state concept presented Jun 2026; informal house market, title risk); Sari Tagh / Nor Aresh (Erebuni; metro #12 "Surmalu" still at design stage); 17th Quarter / Silikyan (Academic City zone; land play, not apartments).</a:t>
+            </a:r>
+          </a:p>
+          <a:p>
+            <a:pPr algn="l" marL="411480" indent="-292608">
+              <a:lnSpc>
+                <a:spcPct val="130000"/>
+              </a:lnSpc>
+              <a:spcAft>
+                <a:spcPts val="600"/>
+              </a:spcAft>
+              <a:buClr>
+                <a:srgbClr val="1F3A5F"/>
+              </a:buClr>
+              <a:buFont typeface="Arial"/>
+              <a:buChar char="▸"/>
+            </a:pPr>
+            <a:r>
+              <a:rPr sz="1800" b="0">
+                <a:solidFill>
+                  <a:srgbClr val="000000"/>
+                </a:solidFill>
+                <a:latin typeface="Helvetica"/>
+              </a:rPr>
+              <a:t>Cheap but unproven momentum: Nor Nork upper massivs (US$1,100 to 1,880, cheapest new-build district); Avan / Acharyan cluster (entry tickets near AMD 16 million; Kotayk next door had +49 percent transactions in 2025).</a:t>
+            </a:r>
+          </a:p>
+          <a:p>
+            <a:pPr algn="l" marL="411480" indent="-292608">
+              <a:lnSpc>
+                <a:spcPct val="130000"/>
+              </a:lnSpc>
+              <a:spcAft>
+                <a:spcPts val="600"/>
+              </a:spcAft>
+              <a:buClr>
+                <a:srgbClr val="1F3A5F"/>
+              </a:buClr>
+              <a:buFont typeface="Arial"/>
+              <a:buChar char="▸"/>
+            </a:pPr>
+            <a:r>
+              <a:rPr sz="1800" b="0">
+                <a:solidFill>
+                  <a:srgbClr val="000000"/>
+                </a:solidFill>
+                <a:latin typeface="Helvetica"/>
+              </a:rPr>
+              <a:t>Milestones to monitor: Ajapnyak metro contractor selection; Yerevan Downtown financing agreement; Kond action plan; Academic City groundbreaking; Isakov-Arshakunyats road completion.</a:t>
+            </a:r>
+          </a:p>
+        </p:txBody>
+      </p:sp>
+      <p:sp>
+        <p:nvSpPr>
+          <p:cNvPr id="4" name="TextBox 3"/>
           <p:cNvSpPr txBox="1"/>
           <p:nvPr/>
         </p:nvSpPr>
@@ -3778,7 +3797,7 @@
                 </a:solidFill>
                 <a:latin typeface="Helvetica"/>
               </a:rPr>
-              <a:t>7. Short-term rentals: workable economics, compounding supply</a:t>
+              <a:t>8. Rents: spike, correction, settled well above pre-war</a:t>
             </a:r>
           </a:p>
         </p:txBody>
@@ -3825,7 +3844,7 @@
                 </a:solidFill>
                 <a:latin typeface="Helvetica"/>
               </a:rPr>
-              <a:t>Market size: 2,400 to 6,000 active listings depending on provider definitions; supply growing 14 to 34 percent per year; only 0.2 percent professionally managed.</a:t>
+              <a:t>2022: rents doubled to tripled within months of the Russian influx; central 2-3 room units went from AMD 140,000 to 180,000 to peaks of 400,000 to 500,000.</a:t>
             </a:r>
           </a:p>
           <a:p>
@@ -3849,7 +3868,7 @@
                 </a:solidFill>
                 <a:latin typeface="Helvetica"/>
               </a:rPr>
-              <a:t>Economics: ADR US$60 to 76; realistic occupancy 50 to 65 percent; a well-run central one-bedroom grosses US$10,000 to 15,000 per year.</a:t>
+              <a:t>2023-24: roughly 30 to 40 percent correction as relocants departed; Karabakh refugees offset at far lower purchasing power.</a:t>
             </a:r>
           </a:p>
           <a:p>
@@ -3873,7 +3892,7 @@
                 </a:solidFill>
                 <a:latin typeface="Helvetica"/>
               </a:rPr>
-              <a:t>Thin premium over long-term letting once cleaning, fees, management, and voids are deducted; real mainly for Kentron units in the May to September window.</a:t>
+              <a:t>Now: central one-bedroom US$550 to 850; most-demanded bracket US$300 to 500; tenant shortage in the US$1,000+ premium tier; rental transactions -28.6 percent in 2025.</a:t>
             </a:r>
           </a:p>
           <a:p>
@@ -3897,7 +3916,7 @@
                 </a:solidFill>
                 <a:latin typeface="Helvetica"/>
               </a:rPr>
-              <a:t>Demand has plateaued: tourist arrivals flat at 2.2 to 2.4 million since 2023, Russian share falling; supply growth exceeds demand growth.</a:t>
+              <a:t>Rents settled 50 to 80 percent above pre-war; realtors' consensus is they will not return to 2021 levels.</a:t>
             </a:r>
           </a:p>
           <a:p>
@@ -3921,7 +3940,31 @@
                 </a:solidFill>
                 <a:latin typeface="Helvetica"/>
               </a:rPr>
-              <a:t>Tax and regulation light: flat 10 percent on gross rent either mode; no STR permit; the 2026 notification system exempts individuals letting one apartment.</a:t>
+              <a:t>Gross yields: 5.5 to 7 percent in the center, 7 to 10 percent in Arabkir and the mid-ring; net about 1.5 to 2 points lower.</a:t>
+            </a:r>
+          </a:p>
+          <a:p>
+            <a:pPr algn="l" marL="411480" indent="-292608">
+              <a:lnSpc>
+                <a:spcPct val="130000"/>
+              </a:lnSpc>
+              <a:spcAft>
+                <a:spcPts val="600"/>
+              </a:spcAft>
+              <a:buClr>
+                <a:srgbClr val="1F3A5F"/>
+              </a:buClr>
+              <a:buFont typeface="Arial"/>
+              <a:buChar char="▸"/>
+            </a:pPr>
+            <a:r>
+              <a:rPr sz="1800" b="0">
+                <a:solidFill>
+                  <a:srgbClr val="000000"/>
+                </a:solidFill>
+                <a:latin typeface="Helvetica"/>
+              </a:rPr>
+              <a:t>CBA governor: price-to-rent ratio rising, investment attractiveness declining.</a:t>
             </a:r>
           </a:p>
         </p:txBody>
@@ -4017,21 +4060,45 @@
                 </a:solidFill>
                 <a:latin typeface="Helvetica"/>
               </a:rPr>
-              <a:t>8. What the specialists say</a:t>
-            </a:r>
-          </a:p>
-        </p:txBody>
-      </p:sp>
-      <p:sp>
-        <p:nvSpPr>
-          <p:cNvPr id="3" name="TextBox 2"/>
+              <a:t>Figure 4. Central Yerevan one-bedroom rent</a:t>
+            </a:r>
+          </a:p>
+        </p:txBody>
+      </p:sp>
+      <p:pic>
+        <p:nvPicPr>
+          <p:cNvPr id="3" name="Picture 2" descr="fig3_rent.png"/>
+          <p:cNvPicPr>
+            <a:picLocks noChangeAspect="1"/>
+          </p:cNvPicPr>
+          <p:nvPr/>
+        </p:nvPicPr>
+        <p:blipFill>
+          <a:blip r:embed="rId2"/>
+          <a:stretch>
+            <a:fillRect/>
+          </a:stretch>
+        </p:blipFill>
+        <p:spPr>
+          <a:xfrm>
+            <a:off x="1942615" y="1188720"/>
+            <a:ext cx="8306465" cy="4480560"/>
+          </a:xfrm>
+          <a:prstGeom prst="rect">
+            <a:avLst/>
+          </a:prstGeom>
+        </p:spPr>
+      </p:pic>
+      <p:sp>
+        <p:nvSpPr>
+          <p:cNvPr id="4" name="TextBox 3"/>
           <p:cNvSpPr txBox="1"/>
           <p:nvPr/>
         </p:nvSpPr>
         <p:spPr>
           <a:xfrm>
-            <a:off x="640080" y="1280160"/>
-            <a:ext cx="10972800" cy="5120640"/>
+            <a:off x="548640" y="5779008"/>
+            <a:ext cx="11064240" cy="365760"/>
           </a:xfrm>
           <a:prstGeom prst="rect">
             <a:avLst/>
@@ -4044,130 +4111,65 @@
           </a:bodyPr>
           <a:lstStyle/>
           <a:p>
-            <a:pPr algn="l" marL="411480" indent="-292608">
-              <a:lnSpc>
-                <a:spcPct val="130000"/>
-              </a:lnSpc>
-              <a:spcAft>
-                <a:spcPts val="600"/>
-              </a:spcAft>
-              <a:buClr>
-                <a:srgbClr val="1F3A5F"/>
-              </a:buClr>
-              <a:buFont typeface="Arial"/>
-              <a:buChar char="▸"/>
-            </a:pPr>
-            <a:r>
-              <a:rPr sz="1800" b="0">
+            <a:pPr algn="ctr">
+              <a:lnSpc>
+                <a:spcPct val="115000"/>
+              </a:lnSpc>
+            </a:pPr>
+            <a:r>
+              <a:rPr sz="1200" b="0">
                 <a:solidFill>
                   <a:srgbClr val="000000"/>
                 </a:solidFill>
                 <a:latin typeface="Helvetica"/>
               </a:rPr>
-              <a:t>IMF: overvaluation 8 to 25 percent (2023); market "now cooling" (Dec 2025); subsidy phase-out credited with the cool-down.</a:t>
-            </a:r>
-          </a:p>
-          <a:p>
-            <a:pPr algn="l" marL="411480" indent="-292608">
-              <a:lnSpc>
-                <a:spcPct val="130000"/>
-              </a:lnSpc>
-              <a:spcAft>
-                <a:spcPts val="600"/>
-              </a:spcAft>
-              <a:buClr>
-                <a:srgbClr val="1F3A5F"/>
-              </a:buClr>
-              <a:buFont typeface="Arial"/>
-              <a:buChar char="▸"/>
-            </a:pPr>
-            <a:r>
-              <a:rPr sz="1800" b="0">
-                <a:solidFill>
-                  <a:srgbClr val="000000"/>
-                </a:solidFill>
-                <a:latin typeface="Helvetica"/>
-              </a:rPr>
-              <a:t>CBA: the most cautious voice; 2024 completions doubled, excess-supply and credit-loss warnings; construction credit +30 percent for two years running.</a:t>
-            </a:r>
-          </a:p>
-          <a:p>
-            <a:pPr algn="l" marL="411480" indent="-292608">
-              <a:lnSpc>
-                <a:spcPct val="130000"/>
-              </a:lnSpc>
-              <a:spcAft>
-                <a:spcPts val="600"/>
-              </a:spcAft>
-              <a:buClr>
-                <a:srgbClr val="1F3A5F"/>
-              </a:buClr>
-              <a:buFont typeface="Arial"/>
-              <a:buChar char="▸"/>
-            </a:pPr>
-            <a:r>
-              <a:rPr sz="1800" b="0">
-                <a:solidFill>
-                  <a:srgbClr val="000000"/>
-                </a:solidFill>
-                <a:latin typeface="Helvetica"/>
-              </a:rPr>
-              <a:t>ADB (2025): prices +100 percent since 2014; bottom three income deciles priced out; market "may be approaching the peak of its cycle."</a:t>
-            </a:r>
-          </a:p>
-          <a:p>
-            <a:pPr algn="l" marL="411480" indent="-292608">
-              <a:lnSpc>
-                <a:spcPct val="130000"/>
-              </a:lnSpc>
-              <a:spcAft>
-                <a:spcPts val="600"/>
-              </a:spcAft>
-              <a:buClr>
-                <a:srgbClr val="1F3A5F"/>
-              </a:buClr>
-              <a:buFont typeface="Arial"/>
-              <a:buChar char="▸"/>
-            </a:pPr>
-            <a:r>
-              <a:rPr sz="1800" b="0">
-                <a:solidFill>
-                  <a:srgbClr val="000000"/>
-                </a:solidFill>
-                <a:latin typeface="Helvetica"/>
-              </a:rPr>
-              <a:t>Local consensus: soft landing; 3 to 7 percent annual growth in prime areas for 2026-27; the skeptics (Luys, Mikaelian, Parsyan) worry about credit, not a crash.</a:t>
-            </a:r>
-          </a:p>
-          <a:p>
-            <a:pPr algn="l" marL="411480" indent="-292608">
-              <a:lnSpc>
-                <a:spcPct val="130000"/>
-              </a:lnSpc>
-              <a:spcAft>
-                <a:spcPts val="600"/>
-              </a:spcAft>
-              <a:buClr>
-                <a:srgbClr val="1F3A5F"/>
-              </a:buClr>
-              <a:buFont typeface="Arial"/>
-              <a:buChar char="▸"/>
-            </a:pPr>
-            <a:r>
-              <a:rPr sz="1800" b="0">
-                <a:solidFill>
-                  <a:srgbClr val="000000"/>
-                </a:solidFill>
-                <a:latin typeface="Helvetica"/>
-              </a:rPr>
-              <a:t>Nobody credible calls Yerevan cheap; nobody credible forecasts a bust.</a:t>
-            </a:r>
-          </a:p>
-        </p:txBody>
-      </p:sp>
-      <p:sp>
-        <p:nvSpPr>
-          <p:cNvPr id="4" name="TextBox 3"/>
+              <a:t>Indicative monthly rent, U.S. dollars, 2021 to 2026.</a:t>
+            </a:r>
+          </a:p>
+        </p:txBody>
+      </p:sp>
+      <p:sp>
+        <p:nvSpPr>
+          <p:cNvPr id="5" name="TextBox 4"/>
+          <p:cNvSpPr txBox="1"/>
+          <p:nvPr/>
+        </p:nvSpPr>
+        <p:spPr>
+          <a:xfrm>
+            <a:off x="548640" y="6099048"/>
+            <a:ext cx="11064240" cy="365760"/>
+          </a:xfrm>
+          <a:prstGeom prst="rect">
+            <a:avLst/>
+          </a:prstGeom>
+          <a:noFill/>
+        </p:spPr>
+        <p:txBody>
+          <a:bodyPr wrap="square" lIns="0" rIns="0" tIns="0" bIns="0" anchor="t">
+            <a:spAutoFit/>
+          </a:bodyPr>
+          <a:lstStyle/>
+          <a:p>
+            <a:pPr algn="ctr">
+              <a:lnSpc>
+                <a:spcPct val="115000"/>
+              </a:lnSpc>
+            </a:pPr>
+            <a:r>
+              <a:rPr sz="1000" b="0">
+                <a:solidFill>
+                  <a:srgbClr val="666666"/>
+                </a:solidFill>
+                <a:latin typeface="Helvetica"/>
+              </a:rPr>
+              <a:t>Sources: CivilNet; JAMnews; Mirror-Spectator; Numbeo; staff splicing.</a:t>
+            </a:r>
+          </a:p>
+        </p:txBody>
+      </p:sp>
+      <p:sp>
+        <p:nvSpPr>
+          <p:cNvPr id="6" name="TextBox 5"/>
           <p:cNvSpPr txBox="1"/>
           <p:nvPr/>
         </p:nvSpPr>
@@ -4256,7 +4258,7 @@
                 </a:solidFill>
                 <a:latin typeface="Helvetica"/>
               </a:rPr>
-              <a:t>9. Outlook and risks</a:t>
+              <a:t>9. Short-term rentals: workable economics, compounding supply</a:t>
             </a:r>
           </a:p>
         </p:txBody>
@@ -4303,7 +4305,7 @@
                 </a:solidFill>
                 <a:latin typeface="Helvetica"/>
               </a:rPr>
-              <a:t>Base case 2026-27: low-single-digit growth in Yerevan apartments (3 to 7 percent in prime areas), continued outperformance of houses and regions.</a:t>
+              <a:t>Market size: 2,400 to 6,000 active listings depending on provider definitions; supply growing 14 to 34 percent per year; only 0.2 percent professionally managed.</a:t>
             </a:r>
           </a:p>
           <a:p>
@@ -4327,7 +4329,7 @@
                 </a:solidFill>
                 <a:latin typeface="Helvetica"/>
               </a:rPr>
-              <a:t>Dominant downside: durability of Russia-linked flows. Non-resident deposits 7.2 percent of GDP; IMF adverse scenario (remittances -45 percent) cuts growth to 3 percent.</a:t>
+              <a:t>Economics: ADR US$60 to 76; realistic occupancy 50 to 65 percent; a well-run central one-bedroom grosses US$10,000 to 15,000 per year.</a:t>
             </a:r>
           </a:p>
           <a:p>
@@ -4351,7 +4353,7 @@
                 </a:solidFill>
                 <a:latin typeface="Helvetica"/>
               </a:rPr>
-              <a:t>Supply risk: completions doubled in 2024; absorption risk concentrated in the elite new-build segment.</a:t>
+              <a:t>Thin premium over long-term letting once cleaning, fees, management, and voids are deducted; real mainly for Kentron units in the May to September window.</a:t>
             </a:r>
           </a:p>
           <a:p>
@@ -4375,7 +4377,7 @@
                 </a:solidFill>
                 <a:latin typeface="Helvetica"/>
               </a:rPr>
-              <a:t>Currency: the dram flattered every recent dollar return; depreciation would cut dollar values even with stable dram prices.</a:t>
+              <a:t>Demand has plateaued: tourist arrivals flat at 2.2 to 2.4 million since 2023, Russian share falling; supply growth exceeds demand growth.</a:t>
             </a:r>
           </a:p>
           <a:p>
@@ -4399,7 +4401,7 @@
                 </a:solidFill>
                 <a:latin typeface="Helvetica"/>
               </a:rPr>
-              <a:t>Upside: August 2025 peace treaty and TRIPP corridor, possible Turkiye border opening, EU-accession process, tourism diversification.</a:t>
+              <a:t>Tax and regulation light: flat 10 percent on gross rent either mode; no STR permit; the 2026 notification system exempts individuals letting one apartment.</a:t>
             </a:r>
           </a:p>
         </p:txBody>
@@ -4495,7 +4497,7 @@
                 </a:solidFill>
                 <a:latin typeface="Helvetica"/>
               </a:rPr>
-              <a:t>10. Considerations for a purchase</a:t>
+              <a:t>10. What the specialists say</a:t>
             </a:r>
           </a:p>
         </p:txBody>
@@ -4542,7 +4544,7 @@
                 </a:solidFill>
                 <a:latin typeface="Helvetica"/>
               </a:rPr>
-              <a:t>Timing: defensible entry; the blow-off is behind the market and central prices are 1 to 2 percent off peak, but the flat window is closing as growth resumes.</a:t>
+              <a:t>IMF: overvaluation 8 to 25 percent (2023); market "now cooling" (Dec 2025); subsidy phase-out credited with the cool-down.</a:t>
             </a:r>
           </a:p>
           <a:p>
@@ -4566,7 +4568,7 @@
                 </a:solidFill>
                 <a:latin typeface="Helvetica"/>
               </a:rPr>
-              <a:t>Two favored configurations: quality Kentron secondary stock, 50 to 75 sq m (liquidity, capital preservation, STR option), or Arabkir and the strong mid-ring for income.</a:t>
+              <a:t>CBA: the most cautious voice; 2024 completions doubled, excess-supply and credit-loss warnings; construction credit +30 percent for two years running.</a:t>
             </a:r>
           </a:p>
           <a:p>
@@ -4590,7 +4592,7 @@
                 </a:solidFill>
                 <a:latin typeface="Helvetica"/>
               </a:rPr>
-              <a:t>Avoid the elite US$3,000+ new-build segment: absorption risk, thinnest secondary market.</a:t>
+              <a:t>ADB (2025): prices +100 percent since 2014; bottom three income deciles priced out; market "may be approaching the peak of its cycle."</a:t>
             </a:r>
           </a:p>
           <a:p>
@@ -4614,7 +4616,7 @@
                 </a:solidFill>
                 <a:latin typeface="Helvetica"/>
               </a:rPr>
-              <a:t>Income math: expect 4.5 to 6 percent net yield either rental mode; total return roughly 8 to 12 percent in dram terms; the exchange rate decides the dollar outcome.</a:t>
+              <a:t>Local consensus: soft landing; 3 to 7 percent annual growth in prime areas for 2026-27; the skeptics (Luys, Mikaelian, Parsyan) worry about credit, not a crash.</a:t>
             </a:r>
           </a:p>
           <a:p>
@@ -4638,31 +4640,7 @@
                 </a:solidFill>
                 <a:latin typeface="Helvetica"/>
               </a:rPr>
-              <a:t>Mechanics: foreigners own apartments freely; cash purchase is the default (mortgages at 12.5 percent); rent taxed at a flat 10 percent.</a:t>
-            </a:r>
-          </a:p>
-          <a:p>
-            <a:pPr algn="l" marL="411480" indent="-292608">
-              <a:lnSpc>
-                <a:spcPct val="130000"/>
-              </a:lnSpc>
-              <a:spcAft>
-                <a:spcPts val="600"/>
-              </a:spcAft>
-              <a:buClr>
-                <a:srgbClr val="1F3A5F"/>
-              </a:buClr>
-              <a:buFont typeface="Arial"/>
-              <a:buChar char="▸"/>
-            </a:pPr>
-            <a:r>
-              <a:rPr sz="1800" b="0">
-                <a:solidFill>
-                  <a:srgbClr val="000000"/>
-                </a:solidFill>
-                <a:latin typeface="Helvetica"/>
-              </a:rPr>
-              <a:t>The residency binary: investment-residence rules due around November 1, 2026; whether residential property qualifies is open. Sequencing the purchase after that decision costs little and may be worth a great deal.</a:t>
+              <a:t>Nobody credible calls Yerevan cheap; nobody credible forecasts a bust.</a:t>
             </a:r>
           </a:p>
         </p:txBody>
@@ -4732,8 +4710,8 @@
         </p:nvSpPr>
         <p:spPr>
           <a:xfrm>
-            <a:off x="0" y="2926080"/>
-            <a:ext cx="12191695" cy="457200"/>
+            <a:off x="548640" y="365760"/>
+            <a:ext cx="10972800" cy="822960"/>
           </a:xfrm>
           <a:prstGeom prst="rect">
             <a:avLst/>
@@ -4746,19 +4724,19 @@
           </a:bodyPr>
           <a:lstStyle/>
           <a:p>
-            <a:pPr algn="ctr">
+            <a:pPr algn="l">
               <a:lnSpc>
                 <a:spcPct val="115000"/>
               </a:lnSpc>
             </a:pPr>
             <a:r>
-              <a:rPr sz="1800" b="1">
-                <a:solidFill>
-                  <a:srgbClr val="666666"/>
-                </a:solidFill>
-                <a:latin typeface="Helvetica"/>
-              </a:rPr>
-              <a:t>DATA ANNEX</a:t>
+              <a:rPr sz="2800" b="1">
+                <a:solidFill>
+                  <a:srgbClr val="1F3A5F"/>
+                </a:solidFill>
+                <a:latin typeface="Helvetica"/>
+              </a:rPr>
+              <a:t>11. Outlook and risks</a:t>
             </a:r>
           </a:p>
         </p:txBody>
@@ -4771,8 +4749,8 @@
         </p:nvSpPr>
         <p:spPr>
           <a:xfrm>
-            <a:off x="0" y="3383280"/>
-            <a:ext cx="12191695" cy="731520"/>
+            <a:off x="640080" y="1280160"/>
+            <a:ext cx="10972800" cy="5120640"/>
           </a:xfrm>
           <a:prstGeom prst="rect">
             <a:avLst/>
@@ -4785,19 +4763,123 @@
           </a:bodyPr>
           <a:lstStyle/>
           <a:p>
-            <a:pPr algn="ctr">
-              <a:lnSpc>
-                <a:spcPct val="115000"/>
-              </a:lnSpc>
-            </a:pPr>
-            <a:r>
-              <a:rPr sz="3000" b="1">
-                <a:solidFill>
-                  <a:srgbClr val="1F3A5F"/>
-                </a:solidFill>
-                <a:latin typeface="Helvetica"/>
-              </a:rPr>
-              <a:t>The Official Data, Drawn</a:t>
+            <a:pPr algn="l" marL="411480" indent="-292608">
+              <a:lnSpc>
+                <a:spcPct val="130000"/>
+              </a:lnSpc>
+              <a:spcAft>
+                <a:spcPts val="600"/>
+              </a:spcAft>
+              <a:buClr>
+                <a:srgbClr val="1F3A5F"/>
+              </a:buClr>
+              <a:buFont typeface="Arial"/>
+              <a:buChar char="▸"/>
+            </a:pPr>
+            <a:r>
+              <a:rPr sz="1800" b="0">
+                <a:solidFill>
+                  <a:srgbClr val="000000"/>
+                </a:solidFill>
+                <a:latin typeface="Helvetica"/>
+              </a:rPr>
+              <a:t>Base case 2026-27: low-single-digit growth in Yerevan apartments (3 to 7 percent in prime areas), continued outperformance of houses and regions.</a:t>
+            </a:r>
+          </a:p>
+          <a:p>
+            <a:pPr algn="l" marL="411480" indent="-292608">
+              <a:lnSpc>
+                <a:spcPct val="130000"/>
+              </a:lnSpc>
+              <a:spcAft>
+                <a:spcPts val="600"/>
+              </a:spcAft>
+              <a:buClr>
+                <a:srgbClr val="1F3A5F"/>
+              </a:buClr>
+              <a:buFont typeface="Arial"/>
+              <a:buChar char="▸"/>
+            </a:pPr>
+            <a:r>
+              <a:rPr sz="1800" b="0">
+                <a:solidFill>
+                  <a:srgbClr val="000000"/>
+                </a:solidFill>
+                <a:latin typeface="Helvetica"/>
+              </a:rPr>
+              <a:t>Dominant downside: durability of Russia-linked flows. Non-resident deposits 7.2 percent of GDP; IMF adverse scenario (remittances -45 percent) cuts growth to 3 percent.</a:t>
+            </a:r>
+          </a:p>
+          <a:p>
+            <a:pPr algn="l" marL="411480" indent="-292608">
+              <a:lnSpc>
+                <a:spcPct val="130000"/>
+              </a:lnSpc>
+              <a:spcAft>
+                <a:spcPts val="600"/>
+              </a:spcAft>
+              <a:buClr>
+                <a:srgbClr val="1F3A5F"/>
+              </a:buClr>
+              <a:buFont typeface="Arial"/>
+              <a:buChar char="▸"/>
+            </a:pPr>
+            <a:r>
+              <a:rPr sz="1800" b="0">
+                <a:solidFill>
+                  <a:srgbClr val="000000"/>
+                </a:solidFill>
+                <a:latin typeface="Helvetica"/>
+              </a:rPr>
+              <a:t>Supply risk: completions doubled in 2024; absorption risk concentrated in the elite new-build segment.</a:t>
+            </a:r>
+          </a:p>
+          <a:p>
+            <a:pPr algn="l" marL="411480" indent="-292608">
+              <a:lnSpc>
+                <a:spcPct val="130000"/>
+              </a:lnSpc>
+              <a:spcAft>
+                <a:spcPts val="600"/>
+              </a:spcAft>
+              <a:buClr>
+                <a:srgbClr val="1F3A5F"/>
+              </a:buClr>
+              <a:buFont typeface="Arial"/>
+              <a:buChar char="▸"/>
+            </a:pPr>
+            <a:r>
+              <a:rPr sz="1800" b="0">
+                <a:solidFill>
+                  <a:srgbClr val="000000"/>
+                </a:solidFill>
+                <a:latin typeface="Helvetica"/>
+              </a:rPr>
+              <a:t>Currency: the dram flattered every recent dollar return; depreciation would cut dollar values even with stable dram prices.</a:t>
+            </a:r>
+          </a:p>
+          <a:p>
+            <a:pPr algn="l" marL="411480" indent="-292608">
+              <a:lnSpc>
+                <a:spcPct val="130000"/>
+              </a:lnSpc>
+              <a:spcAft>
+                <a:spcPts val="600"/>
+              </a:spcAft>
+              <a:buClr>
+                <a:srgbClr val="1F3A5F"/>
+              </a:buClr>
+              <a:buFont typeface="Arial"/>
+              <a:buChar char="▸"/>
+            </a:pPr>
+            <a:r>
+              <a:rPr sz="1800" b="0">
+                <a:solidFill>
+                  <a:srgbClr val="000000"/>
+                </a:solidFill>
+                <a:latin typeface="Helvetica"/>
+              </a:rPr>
+              <a:t>Upside: August 2025 peace treaty and TRIPP corridor, possible Turkiye border opening, EU-accession process, tourism diversification.</a:t>
             </a:r>
           </a:p>
         </p:txBody>
@@ -4893,45 +4975,21 @@
                 </a:solidFill>
                 <a:latin typeface="Helvetica"/>
               </a:rPr>
-              <a:t>Figure A1. CBA price index: prices nearly doubled since 2018</a:t>
-            </a:r>
-          </a:p>
-        </p:txBody>
-      </p:sp>
-      <p:pic>
-        <p:nvPicPr>
-          <p:cNvPr id="3" name="Picture 2" descr="fig_rppi_idx.png"/>
-          <p:cNvPicPr>
-            <a:picLocks noChangeAspect="1"/>
-          </p:cNvPicPr>
-          <p:nvPr/>
-        </p:nvPicPr>
-        <p:blipFill>
-          <a:blip r:embed="rId2"/>
-          <a:stretch>
-            <a:fillRect/>
-          </a:stretch>
-        </p:blipFill>
-        <p:spPr>
-          <a:xfrm>
-            <a:off x="1451178" y="1188720"/>
-            <a:ext cx="9289338" cy="4480560"/>
-          </a:xfrm>
-          <a:prstGeom prst="rect">
-            <a:avLst/>
-          </a:prstGeom>
-        </p:spPr>
-      </p:pic>
-      <p:sp>
-        <p:nvSpPr>
-          <p:cNvPr id="4" name="TextBox 3"/>
+              <a:t>12. Considerations for a purchase</a:t>
+            </a:r>
+          </a:p>
+        </p:txBody>
+      </p:sp>
+      <p:sp>
+        <p:nvSpPr>
+          <p:cNvPr id="3" name="TextBox 2"/>
           <p:cNvSpPr txBox="1"/>
           <p:nvPr/>
         </p:nvSpPr>
         <p:spPr>
           <a:xfrm>
-            <a:off x="548640" y="5779008"/>
-            <a:ext cx="11064240" cy="365760"/>
+            <a:off x="640080" y="1280160"/>
+            <a:ext cx="10972800" cy="5120640"/>
           </a:xfrm>
           <a:prstGeom prst="rect">
             <a:avLst/>
@@ -4944,65 +5002,154 @@
           </a:bodyPr>
           <a:lstStyle/>
           <a:p>
-            <a:pPr algn="ctr">
-              <a:lnSpc>
-                <a:spcPct val="115000"/>
-              </a:lnSpc>
-            </a:pPr>
-            <a:r>
-              <a:rPr sz="1200" b="0">
+            <a:pPr algn="l" marL="411480" indent="-292608">
+              <a:lnSpc>
+                <a:spcPct val="130000"/>
+              </a:lnSpc>
+              <a:spcAft>
+                <a:spcPts val="600"/>
+              </a:spcAft>
+              <a:buClr>
+                <a:srgbClr val="1F3A5F"/>
+              </a:buClr>
+              <a:buFont typeface="Arial"/>
+              <a:buChar char="▸"/>
+            </a:pPr>
+            <a:r>
+              <a:rPr sz="1800" b="0">
                 <a:solidFill>
                   <a:srgbClr val="000000"/>
                 </a:solidFill>
                 <a:latin typeface="Helvetica"/>
               </a:rPr>
-              <a:t>Residential property price index by segment, quarterly, 2018Q1 to 2026Q2 (2018 = 100).</a:t>
-            </a:r>
-          </a:p>
-        </p:txBody>
-      </p:sp>
-      <p:sp>
-        <p:nvSpPr>
-          <p:cNvPr id="5" name="TextBox 4"/>
-          <p:cNvSpPr txBox="1"/>
-          <p:nvPr/>
-        </p:nvSpPr>
-        <p:spPr>
-          <a:xfrm>
-            <a:off x="548640" y="6099048"/>
-            <a:ext cx="11064240" cy="365760"/>
-          </a:xfrm>
-          <a:prstGeom prst="rect">
-            <a:avLst/>
-          </a:prstGeom>
-          <a:noFill/>
-        </p:spPr>
-        <p:txBody>
-          <a:bodyPr wrap="square" lIns="0" rIns="0" tIns="0" bIns="0" anchor="t">
-            <a:spAutoFit/>
-          </a:bodyPr>
-          <a:lstStyle/>
-          <a:p>
-            <a:pPr algn="ctr">
-              <a:lnSpc>
-                <a:spcPct val="115000"/>
-              </a:lnSpc>
-            </a:pPr>
-            <a:r>
-              <a:rPr sz="1000" b="0">
-                <a:solidFill>
-                  <a:srgbClr val="666666"/>
-                </a:solidFill>
-                <a:latin typeface="Helvetica"/>
-              </a:rPr>
-              <a:t>Source: Central Bank of Armenia RPPI data export, downloaded September 2, 2026.</a:t>
-            </a:r>
-          </a:p>
-        </p:txBody>
-      </p:sp>
-      <p:sp>
-        <p:nvSpPr>
-          <p:cNvPr id="6" name="TextBox 5"/>
+              <a:t>Timing: defensible entry; the blow-off is behind the market and central prices are 1 to 2 percent off peak, but the flat window is closing as growth resumes.</a:t>
+            </a:r>
+          </a:p>
+          <a:p>
+            <a:pPr algn="l" marL="411480" indent="-292608">
+              <a:lnSpc>
+                <a:spcPct val="130000"/>
+              </a:lnSpc>
+              <a:spcAft>
+                <a:spcPts val="600"/>
+              </a:spcAft>
+              <a:buClr>
+                <a:srgbClr val="1F3A5F"/>
+              </a:buClr>
+              <a:buFont typeface="Arial"/>
+              <a:buChar char="▸"/>
+            </a:pPr>
+            <a:r>
+              <a:rPr sz="1800" b="0">
+                <a:solidFill>
+                  <a:srgbClr val="000000"/>
+                </a:solidFill>
+                <a:latin typeface="Helvetica"/>
+              </a:rPr>
+              <a:t>Two favored configurations: quality Kentron secondary stock, 50 to 75 sq m (liquidity, capital preservation, STR option), or Arabkir and the strong mid-ring for income.</a:t>
+            </a:r>
+          </a:p>
+          <a:p>
+            <a:pPr algn="l" marL="411480" indent="-292608">
+              <a:lnSpc>
+                <a:spcPct val="130000"/>
+              </a:lnSpc>
+              <a:spcAft>
+                <a:spcPts val="600"/>
+              </a:spcAft>
+              <a:buClr>
+                <a:srgbClr val="1F3A5F"/>
+              </a:buClr>
+              <a:buFont typeface="Arial"/>
+              <a:buChar char="▸"/>
+            </a:pPr>
+            <a:r>
+              <a:rPr sz="1800" b="0">
+                <a:solidFill>
+                  <a:srgbClr val="000000"/>
+                </a:solidFill>
+                <a:latin typeface="Helvetica"/>
+              </a:rPr>
+              <a:t>Avoid the elite US$3,000+ new-build segment: absorption risk, thinnest secondary market.</a:t>
+            </a:r>
+          </a:p>
+          <a:p>
+            <a:pPr algn="l" marL="411480" indent="-292608">
+              <a:lnSpc>
+                <a:spcPct val="130000"/>
+              </a:lnSpc>
+              <a:spcAft>
+                <a:spcPts val="600"/>
+              </a:spcAft>
+              <a:buClr>
+                <a:srgbClr val="1F3A5F"/>
+              </a:buClr>
+              <a:buFont typeface="Arial"/>
+              <a:buChar char="▸"/>
+            </a:pPr>
+            <a:r>
+              <a:rPr sz="1800" b="0">
+                <a:solidFill>
+                  <a:srgbClr val="000000"/>
+                </a:solidFill>
+                <a:latin typeface="Helvetica"/>
+              </a:rPr>
+              <a:t>Income math: expect 4.5 to 6 percent net yield either rental mode; total return roughly 8 to 12 percent in dram terms; the exchange rate decides the dollar outcome.</a:t>
+            </a:r>
+          </a:p>
+          <a:p>
+            <a:pPr algn="l" marL="411480" indent="-292608">
+              <a:lnSpc>
+                <a:spcPct val="130000"/>
+              </a:lnSpc>
+              <a:spcAft>
+                <a:spcPts val="600"/>
+              </a:spcAft>
+              <a:buClr>
+                <a:srgbClr val="1F3A5F"/>
+              </a:buClr>
+              <a:buFont typeface="Arial"/>
+              <a:buChar char="▸"/>
+            </a:pPr>
+            <a:r>
+              <a:rPr sz="1800" b="0">
+                <a:solidFill>
+                  <a:srgbClr val="000000"/>
+                </a:solidFill>
+                <a:latin typeface="Helvetica"/>
+              </a:rPr>
+              <a:t>Mechanics: foreigners own apartments freely; cash purchase is the default (mortgages at 12.5 percent); rent taxed at a flat 10 percent.</a:t>
+            </a:r>
+          </a:p>
+          <a:p>
+            <a:pPr algn="l" marL="411480" indent="-292608">
+              <a:lnSpc>
+                <a:spcPct val="130000"/>
+              </a:lnSpc>
+              <a:spcAft>
+                <a:spcPts val="600"/>
+              </a:spcAft>
+              <a:buClr>
+                <a:srgbClr val="1F3A5F"/>
+              </a:buClr>
+              <a:buFont typeface="Arial"/>
+              <a:buChar char="▸"/>
+            </a:pPr>
+            <a:r>
+              <a:rPr sz="1800" b="0">
+                <a:solidFill>
+                  <a:srgbClr val="000000"/>
+                </a:solidFill>
+                <a:latin typeface="Helvetica"/>
+              </a:rPr>
+              <a:t>The residency binary: investment-residence rules due around November 1, 2026; whether residential property qualifies is open. Sequencing the purchase after that decision costs little and may be worth a great deal.</a:t>
+            </a:r>
+          </a:p>
+        </p:txBody>
+      </p:sp>
+      <p:sp>
+        <p:nvSpPr>
+          <p:cNvPr id="4" name="TextBox 3"/>
           <p:cNvSpPr txBox="1"/>
           <p:nvPr/>
         </p:nvSpPr>
@@ -5065,8 +5212,8 @@
         </p:nvSpPr>
         <p:spPr>
           <a:xfrm>
-            <a:off x="548640" y="365760"/>
-            <a:ext cx="10972800" cy="822960"/>
+            <a:off x="0" y="2926080"/>
+            <a:ext cx="12191695" cy="457200"/>
           </a:xfrm>
           <a:prstGeom prst="rect">
             <a:avLst/>
@@ -5079,57 +5226,33 @@
           </a:bodyPr>
           <a:lstStyle/>
           <a:p>
-            <a:pPr algn="l">
+            <a:pPr algn="ctr">
               <a:lnSpc>
                 <a:spcPct val="115000"/>
               </a:lnSpc>
             </a:pPr>
             <a:r>
-              <a:rPr sz="2800" b="1">
-                <a:solidFill>
-                  <a:srgbClr val="1F3A5F"/>
-                </a:solidFill>
-                <a:latin typeface="Helvetica"/>
-              </a:rPr>
-              <a:t>Figure A2. Year-on-year growth: boom, 2025 pause, 2026 re-acceleration</a:t>
-            </a:r>
-          </a:p>
-        </p:txBody>
-      </p:sp>
-      <p:pic>
-        <p:nvPicPr>
-          <p:cNvPr id="3" name="Picture 2" descr="fig_rppi_yoy.png"/>
-          <p:cNvPicPr>
-            <a:picLocks noChangeAspect="1"/>
-          </p:cNvPicPr>
-          <p:nvPr/>
-        </p:nvPicPr>
-        <p:blipFill>
-          <a:blip r:embed="rId2"/>
-          <a:stretch>
-            <a:fillRect/>
-          </a:stretch>
-        </p:blipFill>
-        <p:spPr>
-          <a:xfrm>
-            <a:off x="746607" y="1188720"/>
-            <a:ext cx="10698480" cy="4369058"/>
-          </a:xfrm>
-          <a:prstGeom prst="rect">
-            <a:avLst/>
-          </a:prstGeom>
-        </p:spPr>
-      </p:pic>
-      <p:sp>
-        <p:nvSpPr>
-          <p:cNvPr id="4" name="TextBox 3"/>
+              <a:rPr sz="1800" b="1">
+                <a:solidFill>
+                  <a:srgbClr val="666666"/>
+                </a:solidFill>
+                <a:latin typeface="Helvetica"/>
+              </a:rPr>
+              <a:t>DATA ANNEX</a:t>
+            </a:r>
+          </a:p>
+        </p:txBody>
+      </p:sp>
+      <p:sp>
+        <p:nvSpPr>
+          <p:cNvPr id="3" name="TextBox 2"/>
           <p:cNvSpPr txBox="1"/>
           <p:nvPr/>
         </p:nvSpPr>
         <p:spPr>
           <a:xfrm>
-            <a:off x="548640" y="5667506"/>
-            <a:ext cx="11064240" cy="365760"/>
+            <a:off x="0" y="3383280"/>
+            <a:ext cx="12191695" cy="731520"/>
           </a:xfrm>
           <a:prstGeom prst="rect">
             <a:avLst/>
@@ -5148,59 +5271,20 @@
               </a:lnSpc>
             </a:pPr>
             <a:r>
-              <a:rPr sz="1200" b="0">
-                <a:solidFill>
-                  <a:srgbClr val="000000"/>
-                </a:solidFill>
-                <a:latin typeface="Helvetica"/>
-              </a:rPr>
-              <a:t>RPPI, percent change on the same quarter a year earlier; 2026Q2: +12.0 percent.</a:t>
-            </a:r>
-          </a:p>
-        </p:txBody>
-      </p:sp>
-      <p:sp>
-        <p:nvSpPr>
-          <p:cNvPr id="5" name="TextBox 4"/>
-          <p:cNvSpPr txBox="1"/>
-          <p:nvPr/>
-        </p:nvSpPr>
-        <p:spPr>
-          <a:xfrm>
-            <a:off x="548640" y="5987546"/>
-            <a:ext cx="11064240" cy="365760"/>
-          </a:xfrm>
-          <a:prstGeom prst="rect">
-            <a:avLst/>
-          </a:prstGeom>
-          <a:noFill/>
-        </p:spPr>
-        <p:txBody>
-          <a:bodyPr wrap="square" lIns="0" rIns="0" tIns="0" bIns="0" anchor="t">
-            <a:spAutoFit/>
-          </a:bodyPr>
-          <a:lstStyle/>
-          <a:p>
-            <a:pPr algn="ctr">
-              <a:lnSpc>
-                <a:spcPct val="115000"/>
-              </a:lnSpc>
-            </a:pPr>
-            <a:r>
-              <a:rPr sz="1000" b="0">
-                <a:solidFill>
-                  <a:srgbClr val="666666"/>
-                </a:solidFill>
-                <a:latin typeface="Helvetica"/>
-              </a:rPr>
-              <a:t>Source: CBA RPPI data export; staff calculations.</a:t>
-            </a:r>
-          </a:p>
-        </p:txBody>
-      </p:sp>
-      <p:sp>
-        <p:nvSpPr>
-          <p:cNvPr id="6" name="TextBox 5"/>
+              <a:rPr sz="3000" b="1">
+                <a:solidFill>
+                  <a:srgbClr val="1F3A5F"/>
+                </a:solidFill>
+                <a:latin typeface="Helvetica"/>
+              </a:rPr>
+              <a:t>The Official Data, Drawn</a:t>
+            </a:r>
+          </a:p>
+        </p:txBody>
+      </p:sp>
+      <p:sp>
+        <p:nvSpPr>
+          <p:cNvPr id="4" name="TextBox 3"/>
           <p:cNvSpPr txBox="1"/>
           <p:nvPr/>
         </p:nvSpPr>
@@ -5289,14 +5373,14 @@
                 </a:solidFill>
                 <a:latin typeface="Helvetica"/>
               </a:rPr>
-              <a:t>Figure A3. Apartment prices by Yerevan zone</a:t>
+              <a:t>Figure A1. CBA price index: prices nearly doubled since 2018</a:t>
             </a:r>
           </a:p>
         </p:txBody>
       </p:sp>
       <p:pic>
         <p:nvPicPr>
-          <p:cNvPr id="3" name="Picture 2" descr="fig_zones.png"/>
+          <p:cNvPr id="3" name="Picture 2" descr="fig_rppi_idx.png"/>
           <p:cNvPicPr>
             <a:picLocks noChangeAspect="1"/>
           </p:cNvPicPr>
@@ -5310,8 +5394,8 @@
         </p:blipFill>
         <p:spPr>
           <a:xfrm>
-            <a:off x="1215115" y="1188720"/>
-            <a:ext cx="9761464" cy="4480560"/>
+            <a:off x="1451178" y="1188720"/>
+            <a:ext cx="9289338" cy="4480560"/>
           </a:xfrm>
           <a:prstGeom prst="rect">
             <a:avLst/>
@@ -5352,7 +5436,7 @@
                 </a:solidFill>
                 <a:latin typeface="Helvetica"/>
               </a:rPr>
-              <a:t>Apartment price index by Yerevan zone (2018 = 100); Yerevan-Center +24.0 percent y/y in 2026Q2.</a:t>
+              <a:t>Residential property price index by segment, quarterly, 2018Q1 to 2026Q2 (2018 = 100).</a:t>
             </a:r>
           </a:p>
         </p:txBody>
@@ -5391,7 +5475,7 @@
                 </a:solidFill>
                 <a:latin typeface="Helvetica"/>
               </a:rPr>
-              <a:t>Source: CBA RPPI data export.</a:t>
+              <a:t>Source: Central Bank of Armenia RPPI data export, downloaded September 2, 2026.</a:t>
             </a:r>
           </a:p>
         </p:txBody>
@@ -5726,14 +5810,14 @@
                 </a:solidFill>
                 <a:latin typeface="Helvetica"/>
               </a:rPr>
-              <a:t>Figure A4. Transactions at record levels</a:t>
+              <a:t>Figure A2. Year-on-year growth: boom, 2025 pause, 2026 re-acceleration</a:t>
             </a:r>
           </a:p>
         </p:txBody>
       </p:sp>
       <p:pic>
         <p:nvPicPr>
-          <p:cNvPr id="3" name="Picture 2" descr="fig_tx.png"/>
+          <p:cNvPr id="3" name="Picture 2" descr="fig_rppi_yoy.png"/>
           <p:cNvPicPr>
             <a:picLocks noChangeAspect="1"/>
           </p:cNvPicPr>
@@ -5789,7 +5873,7 @@
                 </a:solidFill>
                 <a:latin typeface="Helvetica"/>
               </a:rPr>
-              <a:t>Residential property sale transactions per quarter; 2026Q2: 8,497 deals worth AMD 289.7 billion.</a:t>
+              <a:t>RPPI, percent change on the same quarter a year earlier; 2026Q2: +12.0 percent.</a:t>
             </a:r>
           </a:p>
         </p:txBody>
@@ -5828,7 +5912,7 @@
                 </a:solidFill>
                 <a:latin typeface="Helvetica"/>
               </a:rPr>
-              <a:t>Source: CBA RPPI data export.</a:t>
+              <a:t>Source: CBA RPPI data export; staff calculations.</a:t>
             </a:r>
           </a:p>
         </p:txBody>
@@ -5924,14 +6008,14 @@
                 </a:solidFill>
                 <a:latin typeface="Helvetica"/>
               </a:rPr>
-              <a:t>Figure A5. The new-build premium by district</a:t>
+              <a:t>Figure A3. Apartment prices by Yerevan zone</a:t>
             </a:r>
           </a:p>
         </p:txBody>
       </p:sp>
       <p:pic>
         <p:nvPicPr>
-          <p:cNvPr id="3" name="Picture 2" descr="fig_nb.png"/>
+          <p:cNvPr id="3" name="Picture 2" descr="fig_zones.png"/>
           <p:cNvPicPr>
             <a:picLocks noChangeAspect="1"/>
           </p:cNvPicPr>
@@ -5945,8 +6029,8 @@
         </p:blipFill>
         <p:spPr>
           <a:xfrm>
-            <a:off x="2239524" y="1188720"/>
-            <a:ext cx="7712647" cy="4480560"/>
+            <a:off x="1215115" y="1188720"/>
+            <a:ext cx="9761464" cy="4480560"/>
           </a:xfrm>
           <a:prstGeom prst="rect">
             <a:avLst/>
@@ -5987,7 +6071,7 @@
                 </a:solidFill>
                 <a:latin typeface="Helvetica"/>
               </a:rPr>
-              <a:t>Secondary-market average vs. new-build minimum asking, AMD thousands per sq m, mid-2026.</a:t>
+              <a:t>Apartment price index by Yerevan zone (2018 = 100); Yerevan-Center +24.0 percent y/y in 2026Q2.</a:t>
             </a:r>
           </a:p>
         </p:txBody>
@@ -6026,7 +6110,7 @@
                 </a:solidFill>
                 <a:latin typeface="Helvetica"/>
               </a:rPr>
-              <a:t>Sources: b24.am district tables (Jun 2026); karucapatoxic.am new-build asking prices (Jul 2026).</a:t>
+              <a:t>Source: CBA RPPI data export.</a:t>
             </a:r>
           </a:p>
         </p:txBody>
@@ -6122,14 +6206,14 @@
                 </a:solidFill>
                 <a:latin typeface="Helvetica"/>
               </a:rPr>
-              <a:t>Figure A6. Macro backdrop: IMF WEO series and projections</a:t>
+              <a:t>Figure A4. Transactions at record levels</a:t>
             </a:r>
           </a:p>
         </p:txBody>
       </p:sp>
       <p:pic>
         <p:nvPicPr>
-          <p:cNvPr id="3" name="Picture 2" descr="fig_weo.png"/>
+          <p:cNvPr id="3" name="Picture 2" descr="fig_tx.png"/>
           <p:cNvPicPr>
             <a:picLocks noChangeAspect="1"/>
           </p:cNvPicPr>
@@ -6143,8 +6227,8 @@
         </p:blipFill>
         <p:spPr>
           <a:xfrm>
-            <a:off x="1960169" y="1188720"/>
-            <a:ext cx="8271357" cy="4480560"/>
+            <a:off x="746607" y="1188720"/>
+            <a:ext cx="10698480" cy="4369058"/>
           </a:xfrm>
           <a:prstGeom prst="rect">
             <a:avLst/>
@@ -6159,7 +6243,7 @@
         </p:nvSpPr>
         <p:spPr>
           <a:xfrm>
-            <a:off x="548640" y="5779008"/>
+            <a:off x="548640" y="5667506"/>
             <a:ext cx="11064240" cy="365760"/>
           </a:xfrm>
           <a:prstGeom prst="rect">
@@ -6185,7 +6269,7 @@
                 </a:solidFill>
                 <a:latin typeface="Helvetica"/>
               </a:rPr>
-              <a:t>Growth, inflation, current account, and debt, 2015 to 2031; projections from 2026.</a:t>
+              <a:t>Residential property sale transactions per quarter; 2026Q2: 8,497 deals worth AMD 289.7 billion.</a:t>
             </a:r>
           </a:p>
         </p:txBody>
@@ -6198,7 +6282,7 @@
         </p:nvSpPr>
         <p:spPr>
           <a:xfrm>
-            <a:off x="548640" y="6099048"/>
+            <a:off x="548640" y="5987546"/>
             <a:ext cx="11064240" cy="365760"/>
           </a:xfrm>
           <a:prstGeom prst="rect">
@@ -6224,7 +6308,7 @@
                 </a:solidFill>
                 <a:latin typeface="Helvetica"/>
               </a:rPr>
-              <a:t>Source: IMF World Economic Outlook database, April 2026.</a:t>
+              <a:t>Source: CBA RPPI data export.</a:t>
             </a:r>
           </a:p>
         </p:txBody>
@@ -6264,6 +6348,402 @@
                 <a:latin typeface="Helvetica"/>
               </a:rPr>
               <a:t>22</a:t>
+            </a:r>
+          </a:p>
+        </p:txBody>
+      </p:sp>
+    </p:spTree>
+  </p:cSld>
+  <p:clrMapOvr>
+    <a:masterClrMapping/>
+  </p:clrMapOvr>
+</p:sld>
+</file>
+
+<file path=ppt/slides/slide23.xml><?xml version="1.0" encoding="utf-8"?>
+<p:sld xmlns:a="http://schemas.openxmlformats.org/drawingml/2006/main" xmlns:p="http://schemas.openxmlformats.org/presentationml/2006/main" xmlns:r="http://schemas.openxmlformats.org/officeDocument/2006/relationships">
+  <p:cSld>
+    <p:spTree>
+      <p:nvGrpSpPr>
+        <p:cNvPr id="1" name=""/>
+        <p:cNvGrpSpPr/>
+        <p:nvPr/>
+      </p:nvGrpSpPr>
+      <p:grpSpPr/>
+      <p:sp>
+        <p:nvSpPr>
+          <p:cNvPr id="2" name="TextBox 1"/>
+          <p:cNvSpPr txBox="1"/>
+          <p:nvPr/>
+        </p:nvSpPr>
+        <p:spPr>
+          <a:xfrm>
+            <a:off x="548640" y="365760"/>
+            <a:ext cx="10972800" cy="822960"/>
+          </a:xfrm>
+          <a:prstGeom prst="rect">
+            <a:avLst/>
+          </a:prstGeom>
+          <a:noFill/>
+        </p:spPr>
+        <p:txBody>
+          <a:bodyPr wrap="square" lIns="0" rIns="0" tIns="0" bIns="0" anchor="t">
+            <a:spAutoFit/>
+          </a:bodyPr>
+          <a:lstStyle/>
+          <a:p>
+            <a:pPr algn="l">
+              <a:lnSpc>
+                <a:spcPct val="115000"/>
+              </a:lnSpc>
+            </a:pPr>
+            <a:r>
+              <a:rPr sz="2800" b="1">
+                <a:solidFill>
+                  <a:srgbClr val="1F3A5F"/>
+                </a:solidFill>
+                <a:latin typeface="Helvetica"/>
+              </a:rPr>
+              <a:t>Figure A5. The new-build premium by district</a:t>
+            </a:r>
+          </a:p>
+        </p:txBody>
+      </p:sp>
+      <p:pic>
+        <p:nvPicPr>
+          <p:cNvPr id="3" name="Picture 2" descr="fig_nb.png"/>
+          <p:cNvPicPr>
+            <a:picLocks noChangeAspect="1"/>
+          </p:cNvPicPr>
+          <p:nvPr/>
+        </p:nvPicPr>
+        <p:blipFill>
+          <a:blip r:embed="rId2"/>
+          <a:stretch>
+            <a:fillRect/>
+          </a:stretch>
+        </p:blipFill>
+        <p:spPr>
+          <a:xfrm>
+            <a:off x="2239524" y="1188720"/>
+            <a:ext cx="7712647" cy="4480560"/>
+          </a:xfrm>
+          <a:prstGeom prst="rect">
+            <a:avLst/>
+          </a:prstGeom>
+        </p:spPr>
+      </p:pic>
+      <p:sp>
+        <p:nvSpPr>
+          <p:cNvPr id="4" name="TextBox 3"/>
+          <p:cNvSpPr txBox="1"/>
+          <p:nvPr/>
+        </p:nvSpPr>
+        <p:spPr>
+          <a:xfrm>
+            <a:off x="548640" y="5779008"/>
+            <a:ext cx="11064240" cy="365760"/>
+          </a:xfrm>
+          <a:prstGeom prst="rect">
+            <a:avLst/>
+          </a:prstGeom>
+          <a:noFill/>
+        </p:spPr>
+        <p:txBody>
+          <a:bodyPr wrap="square" lIns="0" rIns="0" tIns="0" bIns="0" anchor="t">
+            <a:spAutoFit/>
+          </a:bodyPr>
+          <a:lstStyle/>
+          <a:p>
+            <a:pPr algn="ctr">
+              <a:lnSpc>
+                <a:spcPct val="115000"/>
+              </a:lnSpc>
+            </a:pPr>
+            <a:r>
+              <a:rPr sz="1200" b="0">
+                <a:solidFill>
+                  <a:srgbClr val="000000"/>
+                </a:solidFill>
+                <a:latin typeface="Helvetica"/>
+              </a:rPr>
+              <a:t>Secondary-market average vs. new-build minimum asking, AMD thousands per sq m, mid-2026.</a:t>
+            </a:r>
+          </a:p>
+        </p:txBody>
+      </p:sp>
+      <p:sp>
+        <p:nvSpPr>
+          <p:cNvPr id="5" name="TextBox 4"/>
+          <p:cNvSpPr txBox="1"/>
+          <p:nvPr/>
+        </p:nvSpPr>
+        <p:spPr>
+          <a:xfrm>
+            <a:off x="548640" y="6099048"/>
+            <a:ext cx="11064240" cy="365760"/>
+          </a:xfrm>
+          <a:prstGeom prst="rect">
+            <a:avLst/>
+          </a:prstGeom>
+          <a:noFill/>
+        </p:spPr>
+        <p:txBody>
+          <a:bodyPr wrap="square" lIns="0" rIns="0" tIns="0" bIns="0" anchor="t">
+            <a:spAutoFit/>
+          </a:bodyPr>
+          <a:lstStyle/>
+          <a:p>
+            <a:pPr algn="ctr">
+              <a:lnSpc>
+                <a:spcPct val="115000"/>
+              </a:lnSpc>
+            </a:pPr>
+            <a:r>
+              <a:rPr sz="1000" b="0">
+                <a:solidFill>
+                  <a:srgbClr val="666666"/>
+                </a:solidFill>
+                <a:latin typeface="Helvetica"/>
+              </a:rPr>
+              <a:t>Sources: b24.am district tables (Jun 2026); karucapatoxic.am new-build asking prices (Jul 2026).</a:t>
+            </a:r>
+          </a:p>
+        </p:txBody>
+      </p:sp>
+      <p:sp>
+        <p:nvSpPr>
+          <p:cNvPr id="6" name="TextBox 5"/>
+          <p:cNvSpPr txBox="1"/>
+          <p:nvPr/>
+        </p:nvSpPr>
+        <p:spPr>
+          <a:xfrm>
+            <a:off x="11430000" y="6537960"/>
+            <a:ext cx="640080" cy="274320"/>
+          </a:xfrm>
+          <a:prstGeom prst="rect">
+            <a:avLst/>
+          </a:prstGeom>
+          <a:noFill/>
+        </p:spPr>
+        <p:txBody>
+          <a:bodyPr wrap="square" lIns="0" rIns="0" tIns="0" bIns="0" anchor="t">
+            <a:spAutoFit/>
+          </a:bodyPr>
+          <a:lstStyle/>
+          <a:p>
+            <a:pPr algn="r">
+              <a:lnSpc>
+                <a:spcPct val="115000"/>
+              </a:lnSpc>
+            </a:pPr>
+            <a:r>
+              <a:rPr sz="1000" b="0">
+                <a:solidFill>
+                  <a:srgbClr val="AAAAAA"/>
+                </a:solidFill>
+                <a:latin typeface="Helvetica"/>
+              </a:rPr>
+              <a:t>23</a:t>
+            </a:r>
+          </a:p>
+        </p:txBody>
+      </p:sp>
+    </p:spTree>
+  </p:cSld>
+  <p:clrMapOvr>
+    <a:masterClrMapping/>
+  </p:clrMapOvr>
+</p:sld>
+</file>
+
+<file path=ppt/slides/slide24.xml><?xml version="1.0" encoding="utf-8"?>
+<p:sld xmlns:a="http://schemas.openxmlformats.org/drawingml/2006/main" xmlns:p="http://schemas.openxmlformats.org/presentationml/2006/main" xmlns:r="http://schemas.openxmlformats.org/officeDocument/2006/relationships">
+  <p:cSld>
+    <p:spTree>
+      <p:nvGrpSpPr>
+        <p:cNvPr id="1" name=""/>
+        <p:cNvGrpSpPr/>
+        <p:nvPr/>
+      </p:nvGrpSpPr>
+      <p:grpSpPr/>
+      <p:sp>
+        <p:nvSpPr>
+          <p:cNvPr id="2" name="TextBox 1"/>
+          <p:cNvSpPr txBox="1"/>
+          <p:nvPr/>
+        </p:nvSpPr>
+        <p:spPr>
+          <a:xfrm>
+            <a:off x="548640" y="365760"/>
+            <a:ext cx="10972800" cy="822960"/>
+          </a:xfrm>
+          <a:prstGeom prst="rect">
+            <a:avLst/>
+          </a:prstGeom>
+          <a:noFill/>
+        </p:spPr>
+        <p:txBody>
+          <a:bodyPr wrap="square" lIns="0" rIns="0" tIns="0" bIns="0" anchor="t">
+            <a:spAutoFit/>
+          </a:bodyPr>
+          <a:lstStyle/>
+          <a:p>
+            <a:pPr algn="l">
+              <a:lnSpc>
+                <a:spcPct val="115000"/>
+              </a:lnSpc>
+            </a:pPr>
+            <a:r>
+              <a:rPr sz="2800" b="1">
+                <a:solidFill>
+                  <a:srgbClr val="1F3A5F"/>
+                </a:solidFill>
+                <a:latin typeface="Helvetica"/>
+              </a:rPr>
+              <a:t>Figure A6. Macro backdrop: IMF WEO series and projections</a:t>
+            </a:r>
+          </a:p>
+        </p:txBody>
+      </p:sp>
+      <p:pic>
+        <p:nvPicPr>
+          <p:cNvPr id="3" name="Picture 2" descr="fig_weo.png"/>
+          <p:cNvPicPr>
+            <a:picLocks noChangeAspect="1"/>
+          </p:cNvPicPr>
+          <p:nvPr/>
+        </p:nvPicPr>
+        <p:blipFill>
+          <a:blip r:embed="rId2"/>
+          <a:stretch>
+            <a:fillRect/>
+          </a:stretch>
+        </p:blipFill>
+        <p:spPr>
+          <a:xfrm>
+            <a:off x="1960169" y="1188720"/>
+            <a:ext cx="8271357" cy="4480560"/>
+          </a:xfrm>
+          <a:prstGeom prst="rect">
+            <a:avLst/>
+          </a:prstGeom>
+        </p:spPr>
+      </p:pic>
+      <p:sp>
+        <p:nvSpPr>
+          <p:cNvPr id="4" name="TextBox 3"/>
+          <p:cNvSpPr txBox="1"/>
+          <p:nvPr/>
+        </p:nvSpPr>
+        <p:spPr>
+          <a:xfrm>
+            <a:off x="548640" y="5779008"/>
+            <a:ext cx="11064240" cy="365760"/>
+          </a:xfrm>
+          <a:prstGeom prst="rect">
+            <a:avLst/>
+          </a:prstGeom>
+          <a:noFill/>
+        </p:spPr>
+        <p:txBody>
+          <a:bodyPr wrap="square" lIns="0" rIns="0" tIns="0" bIns="0" anchor="t">
+            <a:spAutoFit/>
+          </a:bodyPr>
+          <a:lstStyle/>
+          <a:p>
+            <a:pPr algn="ctr">
+              <a:lnSpc>
+                <a:spcPct val="115000"/>
+              </a:lnSpc>
+            </a:pPr>
+            <a:r>
+              <a:rPr sz="1200" b="0">
+                <a:solidFill>
+                  <a:srgbClr val="000000"/>
+                </a:solidFill>
+                <a:latin typeface="Helvetica"/>
+              </a:rPr>
+              <a:t>Growth, inflation, current account, and debt, 2015 to 2031; projections from 2026.</a:t>
+            </a:r>
+          </a:p>
+        </p:txBody>
+      </p:sp>
+      <p:sp>
+        <p:nvSpPr>
+          <p:cNvPr id="5" name="TextBox 4"/>
+          <p:cNvSpPr txBox="1"/>
+          <p:nvPr/>
+        </p:nvSpPr>
+        <p:spPr>
+          <a:xfrm>
+            <a:off x="548640" y="6099048"/>
+            <a:ext cx="11064240" cy="365760"/>
+          </a:xfrm>
+          <a:prstGeom prst="rect">
+            <a:avLst/>
+          </a:prstGeom>
+          <a:noFill/>
+        </p:spPr>
+        <p:txBody>
+          <a:bodyPr wrap="square" lIns="0" rIns="0" tIns="0" bIns="0" anchor="t">
+            <a:spAutoFit/>
+          </a:bodyPr>
+          <a:lstStyle/>
+          <a:p>
+            <a:pPr algn="ctr">
+              <a:lnSpc>
+                <a:spcPct val="115000"/>
+              </a:lnSpc>
+            </a:pPr>
+            <a:r>
+              <a:rPr sz="1000" b="0">
+                <a:solidFill>
+                  <a:srgbClr val="666666"/>
+                </a:solidFill>
+                <a:latin typeface="Helvetica"/>
+              </a:rPr>
+              <a:t>Source: IMF World Economic Outlook database, April 2026.</a:t>
+            </a:r>
+          </a:p>
+        </p:txBody>
+      </p:sp>
+      <p:sp>
+        <p:nvSpPr>
+          <p:cNvPr id="6" name="TextBox 5"/>
+          <p:cNvSpPr txBox="1"/>
+          <p:nvPr/>
+        </p:nvSpPr>
+        <p:spPr>
+          <a:xfrm>
+            <a:off x="11430000" y="6537960"/>
+            <a:ext cx="640080" cy="274320"/>
+          </a:xfrm>
+          <a:prstGeom prst="rect">
+            <a:avLst/>
+          </a:prstGeom>
+          <a:noFill/>
+        </p:spPr>
+        <p:txBody>
+          <a:bodyPr wrap="square" lIns="0" rIns="0" tIns="0" bIns="0" anchor="t">
+            <a:spAutoFit/>
+          </a:bodyPr>
+          <a:lstStyle/>
+          <a:p>
+            <a:pPr algn="r">
+              <a:lnSpc>
+                <a:spcPct val="115000"/>
+              </a:lnSpc>
+            </a:pPr>
+            <a:r>
+              <a:rPr sz="1000" b="0">
+                <a:solidFill>
+                  <a:srgbClr val="AAAAAA"/>
+                </a:solidFill>
+                <a:latin typeface="Helvetica"/>
+              </a:rPr>
+              <a:t>24</a:t>
             </a:r>
           </a:p>
         </p:txBody>
